--- a/大貴/添付ファイル/新事業提案_補強スライド.pptx
+++ b/大貴/添付ファイル/新事業提案_補強スライド.pptx
@@ -8,9 +8,10 @@
     <p:sldId id="256" r:id="rId2"/>
     <p:sldId id="257" r:id="rId3"/>
     <p:sldId id="258" r:id="rId4"/>
+    <p:sldId id="259" r:id="rId5"/>
   </p:sldIdLst>
   <p:notesMasterIdLst>
-    <p:notesMasterId r:id="rId5"/>
+    <p:notesMasterId r:id="rId6"/>
   </p:notesMasterIdLst>
   <p:sldSz cx="12192000" cy="6858000"/>
   <p:notesSz cx="6858000" cy="12192000"/>
@@ -722,6 +723,94 @@
 </p:notes>
 </file>
 
+<file path=ppt/notesSlides/notesSlide4.xml><?xml version="1.0" encoding="utf-8"?>
+<p:notes xmlns:a="http://schemas.openxmlformats.org/drawingml/2006/main" xmlns:r="http://schemas.openxmlformats.org/officeDocument/2006/relationships" xmlns:p="http://schemas.openxmlformats.org/presentationml/2006/main">
+  <p:cSld>
+    <p:spTree>
+      <p:nvGrpSpPr>
+        <p:cNvPr id="1" name=""/>
+        <p:cNvGrpSpPr/>
+        <p:nvPr/>
+      </p:nvGrpSpPr>
+      <p:grpSpPr>
+        <a:xfrm>
+          <a:off x="0" y="0"/>
+          <a:ext cx="0" cy="0"/>
+          <a:chOff x="0" y="0"/>
+          <a:chExt cx="0" cy="0"/>
+        </a:xfrm>
+      </p:grpSpPr>
+      <p:sp>
+        <p:nvSpPr>
+          <p:cNvPr id="2" name="Slide Image Placeholder 1"/>
+          <p:cNvSpPr>
+            <a:spLocks noGrp="1" noRot="1" noChangeAspect="1"/>
+          </p:cNvSpPr>
+          <p:nvPr>
+            <p:ph type="sldImg"/>
+          </p:nvPr>
+        </p:nvSpPr>
+        <p:spPr/>
+      </p:sp>
+      <p:sp>
+        <p:nvSpPr>
+          <p:cNvPr id="3" name="Notes Placeholder 2"/>
+          <p:cNvSpPr>
+            <a:spLocks noGrp="1"/>
+          </p:cNvSpPr>
+          <p:nvPr>
+            <p:ph type="body" idx="1"/>
+          </p:nvPr>
+        </p:nvSpPr>
+        <p:spPr/>
+        <p:txBody>
+          <a:bodyPr/>
+          <a:lstStyle/>
+          <a:p>
+            <a:r>
+              <a:rPr lang="en-US" dirty="0"/>
+              <a:t/>
+            </a:r>
+            <a:endParaRPr lang="en-US" dirty="0"/>
+          </a:p>
+        </p:txBody>
+      </p:sp>
+      <p:sp>
+        <p:nvSpPr>
+          <p:cNvPr id="4" name="Slide Number Placeholder 3"/>
+          <p:cNvSpPr>
+            <a:spLocks noGrp="1"/>
+          </p:cNvSpPr>
+          <p:nvPr>
+            <p:ph type="sldNum" sz="quarter" idx="10"/>
+          </p:nvPr>
+        </p:nvSpPr>
+        <p:spPr/>
+        <p:txBody>
+          <a:bodyPr/>
+          <a:lstStyle/>
+          <a:p>
+            <a:fld id="{F7021451-1387-4CA6-816F-3879F97B5CBC}" type="slidenum">
+              <a:rPr lang="en-US"/>
+              <a:t>4</a:t>
+            </a:fld>
+            <a:endParaRPr lang="en-US"/>
+          </a:p>
+        </p:txBody>
+      </p:sp>
+    </p:spTree>
+    <p:extLst>
+      <p:ext uri="{BB962C8B-B14F-4D97-AF65-F5344CB8AC3E}">
+        <p14:creationId xmlns:p14="http://schemas.microsoft.com/office/powerpoint/2010/main" val="1024086991"/>
+      </p:ext>
+    </p:extLst>
+  </p:cSld>
+  <p:clrMapOvr>
+    <a:masterClrMapping/>
+  </p:clrMapOvr>
+</p:notes>
+</file>
+
 <file path=ppt/slideLayouts/slideLayout1.xml><?xml version="1.0" encoding="utf-8"?>
 <p:sldLayout xmlns:a="http://schemas.openxmlformats.org/drawingml/2006/main" xmlns:r="http://schemas.openxmlformats.org/officeDocument/2006/relationships" xmlns:p="http://schemas.openxmlformats.org/presentationml/2006/main" preserve="1">
   <p:cSld name="DEFAULT">
@@ -1164,7 +1253,7 @@
                 <a:ea typeface="Yu Gothic" pitchFamily="34" charset="-122"/>
                 <a:cs typeface="Yu Gothic" pitchFamily="34" charset="-120"/>
               </a:rPr>
-              <a:t>テキストを学んだ生成AIは「知識」を持つ。しかし「その人」を理解するには、行動データが要る。</a:t>
+              <a:t>「あなたに合わせた」回答をするには、あなたを知る方法が要る。その方法は、実は2つしかない。</a:t>
             </a:r>
             <a:endParaRPr lang="en-US" sz="1500" dirty="0"/>
           </a:p>
@@ -1179,11 +1268,11 @@
         <p:spPr>
           <a:xfrm>
             <a:off x="457200" y="1691640"/>
-            <a:ext cx="3291840" cy="2194560"/>
+            <a:ext cx="5455768" cy="1965960"/>
           </a:xfrm>
           <a:prstGeom prst="roundRect">
             <a:avLst>
-              <a:gd name="adj" fmla="val 3333"/>
+              <a:gd name="adj" fmla="val 3721"/>
             </a:avLst>
           </a:prstGeom>
           <a:solidFill>
@@ -1207,14 +1296,14 @@
         </p:nvSpPr>
         <p:spPr>
           <a:xfrm>
-            <a:off x="685800" y="1920240"/>
+            <a:off x="685800" y="1892808"/>
             <a:ext cx="457200" cy="457200"/>
           </a:xfrm>
           <a:prstGeom prst="ellipse">
             <a:avLst/>
           </a:prstGeom>
           <a:solidFill>
-            <a:srgbClr val="1B2A4A"/>
+            <a:srgbClr val="6E6E6E"/>
           </a:solidFill>
           <a:ln/>
         </p:spPr>
@@ -1227,7 +1316,7 @@
         </p:nvSpPr>
         <p:spPr>
           <a:xfrm>
-            <a:off x="685800" y="1920240"/>
+            <a:off x="685800" y="1892808"/>
             <a:ext cx="457200" cy="457200"/>
           </a:xfrm>
           <a:prstGeom prst="rect">
@@ -1252,7 +1341,7 @@
                 <a:ea typeface="Yu Gothic" pitchFamily="34" charset="-122"/>
                 <a:cs typeface="Yu Gothic" pitchFamily="34" charset="-120"/>
               </a:rPr>
-              <a:t>1</a:t>
+              <a:t>A</a:t>
             </a:r>
             <a:endParaRPr lang="en-US" sz="1600" dirty="0"/>
           </a:p>
@@ -1266,8 +1355,8 @@
         </p:nvSpPr>
         <p:spPr>
           <a:xfrm>
-            <a:off x="1280160" y="1920240"/>
-            <a:ext cx="2240280" cy="457200"/>
+            <a:off x="1280160" y="1874520"/>
+            <a:ext cx="4404208" cy="502920"/>
           </a:xfrm>
           <a:prstGeom prst="rect">
             <a:avLst/>
@@ -1283,7 +1372,7 @@
               <a:buNone/>
             </a:pPr>
             <a:r>
-              <a:rPr lang="en-US" sz="1600" b="1" dirty="0">
+              <a:rPr lang="en-US" sz="1500" b="1" dirty="0">
                 <a:solidFill>
                   <a:srgbClr val="1B2A4A"/>
                 </a:solidFill>
@@ -1291,9 +1380,9 @@
                 <a:ea typeface="Yu Gothic" pitchFamily="34" charset="-122"/>
                 <a:cs typeface="Yu Gothic" pitchFamily="34" charset="-120"/>
               </a:rPr>
-              <a:t>現在の生成AI</a:t>
-            </a:r>
-            <a:endParaRPr lang="en-US" sz="1600" dirty="0"/>
+              <a:t>プロンプトで自己申告する</a:t>
+            </a:r>
+            <a:endParaRPr lang="en-US" sz="1500" dirty="0"/>
           </a:p>
         </p:txBody>
       </p:sp>
@@ -1305,8 +1394,8 @@
         </p:nvSpPr>
         <p:spPr>
           <a:xfrm>
-            <a:off x="731520" y="2514600"/>
-            <a:ext cx="2743200" cy="1143000"/>
+            <a:off x="731520" y="2468880"/>
+            <a:ext cx="4907128" cy="777240"/>
           </a:xfrm>
           <a:prstGeom prst="rect">
             <a:avLst/>
@@ -1320,13 +1409,13 @@
           <a:p>
             <a:pPr marL="342900" indent="-342900">
               <a:spcAft>
-                <a:spcPts val="800"/>
+                <a:spcPts val="600"/>
               </a:spcAft>
               <a:buSzPct val="100000"/>
               <a:buChar char="•"/>
             </a:pPr>
             <a:r>
-              <a:rPr lang="en-US" sz="1250" dirty="0">
+              <a:rPr lang="en-US" sz="1200" dirty="0">
                 <a:solidFill>
                   <a:srgbClr val="3A3A3A"/>
                 </a:solidFill>
@@ -1334,20 +1423,20 @@
                 <a:ea typeface="Yu Gothic" pitchFamily="34" charset="-122"/>
                 <a:cs typeface="Yu Gothic" pitchFamily="34" charset="-120"/>
               </a:rPr>
-              <a:t>学習源はインターネット上のテキストが中心</a:t>
-            </a:r>
-            <a:endParaRPr lang="en-US" sz="1250" dirty="0"/>
+              <a:t>自分の状況や要望を、言葉にして入力する必要がある</a:t>
+            </a:r>
+            <a:endParaRPr lang="en-US" sz="1200" dirty="0"/>
           </a:p>
           <a:p>
             <a:pPr marL="342900" indent="-342900">
               <a:spcAft>
-                <a:spcPts val="800"/>
+                <a:spcPts val="600"/>
               </a:spcAft>
               <a:buSzPct val="100000"/>
               <a:buChar char="•"/>
             </a:pPr>
             <a:r>
-              <a:rPr lang="en-US" sz="1250" dirty="0">
+              <a:rPr lang="en-US" sz="1200" dirty="0">
                 <a:solidFill>
                   <a:srgbClr val="3A3A3A"/>
                 </a:solidFill>
@@ -1355,26 +1444,65 @@
                 <a:ea typeface="Yu Gothic" pitchFamily="34" charset="-122"/>
                 <a:cs typeface="Yu Gothic" pitchFamily="34" charset="-120"/>
               </a:rPr>
-              <a:t>知識は豊富だが、回答は「一般論」にとどまりやすい</a:t>
-            </a:r>
-            <a:endParaRPr lang="en-US" sz="1250" dirty="0"/>
-          </a:p>
-        </p:txBody>
-      </p:sp>
-      <p:sp>
-        <p:nvSpPr>
-          <p:cNvPr id="10" name="Shape 8"/>
-          <p:cNvSpPr/>
-          <p:nvPr/>
-        </p:nvSpPr>
-        <p:spPr>
-          <a:xfrm>
-            <a:off x="4297680" y="1691640"/>
-            <a:ext cx="3291840" cy="2194560"/>
+              <a:t>使いこなせるのは、ITリテラシー・言語化力が高い人だけ</a:t>
+            </a:r>
+            <a:endParaRPr lang="en-US" sz="1200" dirty="0"/>
+          </a:p>
+        </p:txBody>
+      </p:sp>
+      <p:sp>
+        <p:nvSpPr>
+          <p:cNvPr id="10" name="Text 8"/>
+          <p:cNvSpPr/>
+          <p:nvPr/>
+        </p:nvSpPr>
+        <p:spPr>
+          <a:xfrm>
+            <a:off x="731520" y="3200400"/>
+            <a:ext cx="4907128" cy="365760"/>
+          </a:xfrm>
+          <a:prstGeom prst="rect">
+            <a:avLst/>
+          </a:prstGeom>
+          <a:noFill/>
+          <a:ln/>
+        </p:spPr>
+        <p:txBody>
+          <a:bodyPr wrap="square" lIns="0" tIns="0" rIns="0" bIns="0" rtlCol="0" anchor="ctr"/>
+          <a:lstStyle/>
+          <a:p>
+            <a:pPr indent="0" marL="0">
+              <a:buNone/>
+            </a:pPr>
+            <a:r>
+              <a:rPr lang="en-US" sz="1200" b="1" dirty="0">
+                <a:solidFill>
+                  <a:srgbClr val="C7000F"/>
+                </a:solidFill>
+                <a:latin typeface="Yu Gothic" pitchFamily="34" charset="0"/>
+                <a:ea typeface="Yu Gothic" pitchFamily="34" charset="-122"/>
+                <a:cs typeface="Yu Gothic" pitchFamily="34" charset="-120"/>
+              </a:rPr>
+              <a:t>→ 生成AIの恩恵が、一部の人に偏る</a:t>
+            </a:r>
+            <a:endParaRPr lang="en-US" sz="1200" dirty="0"/>
+          </a:p>
+        </p:txBody>
+      </p:sp>
+      <p:sp>
+        <p:nvSpPr>
+          <p:cNvPr id="11" name="Shape 9"/>
+          <p:cNvSpPr/>
+          <p:nvPr/>
+        </p:nvSpPr>
+        <p:spPr>
+          <a:xfrm>
+            <a:off x="6278728" y="1691640"/>
+            <a:ext cx="5455768" cy="1965960"/>
           </a:xfrm>
           <a:prstGeom prst="roundRect">
             <a:avLst>
-              <a:gd name="adj" fmla="val 3333"/>
+              <a:gd name="adj" fmla="val 3721"/>
             </a:avLst>
           </a:prstGeom>
           <a:solidFill>
@@ -1392,33 +1520,33 @@
       </p:sp>
       <p:sp>
         <p:nvSpPr>
-          <p:cNvPr id="11" name="Shape 9"/>
-          <p:cNvSpPr/>
-          <p:nvPr/>
-        </p:nvSpPr>
-        <p:spPr>
-          <a:xfrm>
-            <a:off x="4526280" y="1920240"/>
+          <p:cNvPr id="12" name="Shape 10"/>
+          <p:cNvSpPr/>
+          <p:nvPr/>
+        </p:nvSpPr>
+        <p:spPr>
+          <a:xfrm>
+            <a:off x="6507328" y="1892808"/>
             <a:ext cx="457200" cy="457200"/>
           </a:xfrm>
           <a:prstGeom prst="ellipse">
             <a:avLst/>
           </a:prstGeom>
           <a:solidFill>
-            <a:srgbClr val="C7000F"/>
-          </a:solidFill>
-          <a:ln/>
-        </p:spPr>
-      </p:sp>
-      <p:sp>
-        <p:nvSpPr>
-          <p:cNvPr id="12" name="Text 10"/>
-          <p:cNvSpPr/>
-          <p:nvPr/>
-        </p:nvSpPr>
-        <p:spPr>
-          <a:xfrm>
-            <a:off x="4526280" y="1920240"/>
+            <a:srgbClr val="1B2A4A"/>
+          </a:solidFill>
+          <a:ln/>
+        </p:spPr>
+      </p:sp>
+      <p:sp>
+        <p:nvSpPr>
+          <p:cNvPr id="13" name="Text 11"/>
+          <p:cNvSpPr/>
+          <p:nvPr/>
+        </p:nvSpPr>
+        <p:spPr>
+          <a:xfrm>
+            <a:off x="6507328" y="1892808"/>
             <a:ext cx="457200" cy="457200"/>
           </a:xfrm>
           <a:prstGeom prst="rect">
@@ -1443,7 +1571,7 @@
                 <a:ea typeface="Yu Gothic" pitchFamily="34" charset="-122"/>
                 <a:cs typeface="Yu Gothic" pitchFamily="34" charset="-120"/>
               </a:rPr>
-              <a:t>2</a:t>
+              <a:t>B</a:t>
             </a:r>
             <a:endParaRPr lang="en-US" sz="1600" dirty="0"/>
           </a:p>
@@ -1451,14 +1579,14 @@
       </p:sp>
       <p:sp>
         <p:nvSpPr>
-          <p:cNvPr id="13" name="Text 11"/>
-          <p:cNvSpPr/>
-          <p:nvPr/>
-        </p:nvSpPr>
-        <p:spPr>
-          <a:xfrm>
-            <a:off x="5120640" y="1920240"/>
-            <a:ext cx="2240280" cy="457200"/>
+          <p:cNvPr id="14" name="Text 12"/>
+          <p:cNvSpPr/>
+          <p:nvPr/>
+        </p:nvSpPr>
+        <p:spPr>
+          <a:xfrm>
+            <a:off x="7101688" y="1874520"/>
+            <a:ext cx="4404208" cy="502920"/>
           </a:xfrm>
           <a:prstGeom prst="rect">
             <a:avLst/>
@@ -1474,7 +1602,7 @@
               <a:buNone/>
             </a:pPr>
             <a:r>
-              <a:rPr lang="en-US" sz="1600" b="1" dirty="0">
+              <a:rPr lang="en-US" sz="1500" b="1" dirty="0">
                 <a:solidFill>
                   <a:srgbClr val="1B2A4A"/>
                 </a:solidFill>
@@ -1482,22 +1610,22 @@
                 <a:ea typeface="Yu Gothic" pitchFamily="34" charset="-122"/>
                 <a:cs typeface="Yu Gothic" pitchFamily="34" charset="-120"/>
               </a:rPr>
-              <a:t>決定的な弱点</a:t>
-            </a:r>
-            <a:endParaRPr lang="en-US" sz="1600" dirty="0"/>
-          </a:p>
-        </p:txBody>
-      </p:sp>
-      <p:sp>
-        <p:nvSpPr>
-          <p:cNvPr id="14" name="Text 12"/>
-          <p:cNvSpPr/>
-          <p:nvPr/>
-        </p:nvSpPr>
-        <p:spPr>
-          <a:xfrm>
-            <a:off x="4572000" y="2514600"/>
-            <a:ext cx="2743200" cy="1143000"/>
+              <a:t>行動データから自動的に伝わる</a:t>
+            </a:r>
+            <a:endParaRPr lang="en-US" sz="1500" dirty="0"/>
+          </a:p>
+        </p:txBody>
+      </p:sp>
+      <p:sp>
+        <p:nvSpPr>
+          <p:cNvPr id="15" name="Text 13"/>
+          <p:cNvSpPr/>
+          <p:nvPr/>
+        </p:nvSpPr>
+        <p:spPr>
+          <a:xfrm>
+            <a:off x="6553048" y="2468880"/>
+            <a:ext cx="4907128" cy="777240"/>
           </a:xfrm>
           <a:prstGeom prst="rect">
             <a:avLst/>
@@ -1511,13 +1639,13 @@
           <a:p>
             <a:pPr marL="342900" indent="-342900">
               <a:spcAft>
-                <a:spcPts val="800"/>
+                <a:spcPts val="600"/>
               </a:spcAft>
               <a:buSzPct val="100000"/>
               <a:buChar char="•"/>
             </a:pPr>
             <a:r>
-              <a:rPr lang="en-US" sz="1250" dirty="0">
+              <a:rPr lang="en-US" sz="1200" dirty="0">
                 <a:solidFill>
                   <a:srgbClr val="3A3A3A"/>
                 </a:solidFill>
@@ -1525,20 +1653,20 @@
                 <a:ea typeface="Yu Gothic" pitchFamily="34" charset="-122"/>
                 <a:cs typeface="Yu Gothic" pitchFamily="34" charset="-120"/>
               </a:rPr>
-              <a:t>利用者個人の行動（購買・移動・決済等）を知らない</a:t>
-            </a:r>
-            <a:endParaRPr lang="en-US" sz="1250" dirty="0"/>
+              <a:t>購買・移動・決済等の行動履歴があれば、入力の手間なく「その人」が伝わる</a:t>
+            </a:r>
+            <a:endParaRPr lang="en-US" sz="1200" dirty="0"/>
           </a:p>
           <a:p>
             <a:pPr marL="342900" indent="-342900">
               <a:spcAft>
-                <a:spcPts val="800"/>
+                <a:spcPts val="600"/>
               </a:spcAft>
               <a:buSzPct val="100000"/>
               <a:buChar char="•"/>
             </a:pPr>
             <a:r>
-              <a:rPr lang="en-US" sz="1250" dirty="0">
+              <a:rPr lang="en-US" sz="1200" dirty="0">
                 <a:solidFill>
                   <a:srgbClr val="3A3A3A"/>
                 </a:solidFill>
@@ -1546,99 +1674,72 @@
                 <a:ea typeface="Yu Gothic" pitchFamily="34" charset="-122"/>
                 <a:cs typeface="Yu Gothic" pitchFamily="34" charset="-120"/>
               </a:rPr>
-              <a:t>リアル空間での判断や提案には限界がある</a:t>
-            </a:r>
-            <a:endParaRPr lang="en-US" sz="1250" dirty="0"/>
-          </a:p>
-        </p:txBody>
-      </p:sp>
-      <p:sp>
-        <p:nvSpPr>
-          <p:cNvPr id="15" name="Shape 13"/>
-          <p:cNvSpPr/>
-          <p:nvPr/>
-        </p:nvSpPr>
-        <p:spPr>
-          <a:xfrm>
-            <a:off x="8138160" y="1691640"/>
-            <a:ext cx="3291840" cy="2194560"/>
+              <a:t>リテラシーに関係なく、誰もが恩恵を受けられる</a:t>
+            </a:r>
+            <a:endParaRPr lang="en-US" sz="1200" dirty="0"/>
+          </a:p>
+        </p:txBody>
+      </p:sp>
+      <p:sp>
+        <p:nvSpPr>
+          <p:cNvPr id="16" name="Text 14"/>
+          <p:cNvSpPr/>
+          <p:nvPr/>
+        </p:nvSpPr>
+        <p:spPr>
+          <a:xfrm>
+            <a:off x="6553048" y="3200400"/>
+            <a:ext cx="4907128" cy="365760"/>
+          </a:xfrm>
+          <a:prstGeom prst="rect">
+            <a:avLst/>
+          </a:prstGeom>
+          <a:noFill/>
+          <a:ln/>
+        </p:spPr>
+        <p:txBody>
+          <a:bodyPr wrap="square" lIns="0" tIns="0" rIns="0" bIns="0" rtlCol="0" anchor="ctr"/>
+          <a:lstStyle/>
+          <a:p>
+            <a:pPr indent="0" marL="0">
+              <a:buNone/>
+            </a:pPr>
+            <a:r>
+              <a:rPr lang="en-US" sz="1200" b="1" dirty="0">
+                <a:solidFill>
+                  <a:srgbClr val="1B2A4A"/>
+                </a:solidFill>
+                <a:latin typeface="Yu Gothic" pitchFamily="34" charset="0"/>
+                <a:ea typeface="Yu Gothic" pitchFamily="34" charset="-122"/>
+                <a:cs typeface="Yu Gothic" pitchFamily="34" charset="-120"/>
+              </a:rPr>
+              <a:t>→ しかし、今の生成AIはこの行動データを持っていない</a:t>
+            </a:r>
+            <a:endParaRPr lang="en-US" sz="1200" dirty="0"/>
+          </a:p>
+        </p:txBody>
+      </p:sp>
+      <p:sp>
+        <p:nvSpPr>
+          <p:cNvPr id="17" name="Shape 15"/>
+          <p:cNvSpPr/>
+          <p:nvPr/>
+        </p:nvSpPr>
+        <p:spPr>
+          <a:xfrm>
+            <a:off x="457200" y="3886200"/>
+            <a:ext cx="11277295" cy="914400"/>
           </a:xfrm>
           <a:prstGeom prst="roundRect">
             <a:avLst>
-              <a:gd name="adj" fmla="val 3333"/>
+              <a:gd name="adj" fmla="val 8000"/>
             </a:avLst>
           </a:prstGeom>
           <a:solidFill>
-            <a:srgbClr val="FAFAFA"/>
-          </a:solidFill>
-          <a:ln/>
-          <a:effectLst>
-            <a:outerShdw sx="100000" sy="100000" kx="0" ky="0" algn="bl" rotWithShape="0" blurRad="76200" dist="25400" dir="5400000">
-              <a:srgbClr val="000000">
-                <a:alpha val="12000"/>
-              </a:srgbClr>
-            </a:outerShdw>
-          </a:effectLst>
-        </p:spPr>
-      </p:sp>
-      <p:sp>
-        <p:nvSpPr>
-          <p:cNvPr id="16" name="Shape 14"/>
-          <p:cNvSpPr/>
-          <p:nvPr/>
-        </p:nvSpPr>
-        <p:spPr>
-          <a:xfrm>
-            <a:off x="8366760" y="1920240"/>
-            <a:ext cx="457200" cy="457200"/>
-          </a:xfrm>
-          <a:prstGeom prst="ellipse">
-            <a:avLst/>
-          </a:prstGeom>
-          <a:solidFill>
-            <a:srgbClr val="1E7A4C"/>
-          </a:solidFill>
-          <a:ln/>
-        </p:spPr>
-      </p:sp>
-      <p:sp>
-        <p:nvSpPr>
-          <p:cNvPr id="17" name="Text 15"/>
-          <p:cNvSpPr/>
-          <p:nvPr/>
-        </p:nvSpPr>
-        <p:spPr>
-          <a:xfrm>
-            <a:off x="8366760" y="1920240"/>
-            <a:ext cx="457200" cy="457200"/>
-          </a:xfrm>
-          <a:prstGeom prst="rect">
-            <a:avLst/>
-          </a:prstGeom>
-          <a:noFill/>
-          <a:ln/>
-        </p:spPr>
-        <p:txBody>
-          <a:bodyPr wrap="square" lIns="0" tIns="0" rIns="0" bIns="0" rtlCol="0" anchor="ctr"/>
-          <a:lstStyle/>
-          <a:p>
-            <a:pPr algn="ctr" indent="0" marL="0">
-              <a:buNone/>
-            </a:pPr>
-            <a:r>
-              <a:rPr lang="en-US" sz="1600" b="1" dirty="0">
-                <a:solidFill>
-                  <a:srgbClr val="FFFFFF"/>
-                </a:solidFill>
-                <a:latin typeface="Yu Gothic" pitchFamily="34" charset="0"/>
-                <a:ea typeface="Yu Gothic" pitchFamily="34" charset="-122"/>
-                <a:cs typeface="Yu Gothic" pitchFamily="34" charset="-120"/>
-              </a:rPr>
-              <a:t>3</a:t>
-            </a:r>
-            <a:endParaRPr lang="en-US" sz="1600" dirty="0"/>
-          </a:p>
-        </p:txBody>
+            <a:srgbClr val="F0D9DA"/>
+          </a:solidFill>
+          <a:ln/>
+        </p:spPr>
       </p:sp>
       <p:sp>
         <p:nvSpPr>
@@ -1648,67 +1749,48 @@
         </p:nvSpPr>
         <p:spPr>
           <a:xfrm>
-            <a:off x="8961120" y="1920240"/>
-            <a:ext cx="2240280" cy="457200"/>
-          </a:xfrm>
-          <a:prstGeom prst="rect">
-            <a:avLst/>
-          </a:prstGeom>
-          <a:noFill/>
-          <a:ln/>
-        </p:spPr>
-        <p:txBody>
-          <a:bodyPr wrap="square" lIns="0" tIns="0" rIns="0" bIns="0" rtlCol="0" anchor="ctr"/>
+            <a:off x="822960" y="3995928"/>
+            <a:ext cx="10545775" cy="694944"/>
+          </a:xfrm>
+          <a:prstGeom prst="rect">
+            <a:avLst/>
+          </a:prstGeom>
+          <a:noFill/>
+          <a:ln/>
+        </p:spPr>
+        <p:txBody>
+          <a:bodyPr wrap="square" lIns="0" tIns="0" rIns="0" bIns="0" rtlCol="0" anchor="t"/>
           <a:lstStyle/>
           <a:p>
             <a:pPr indent="0" marL="0">
-              <a:buNone/>
-            </a:pPr>
-            <a:r>
-              <a:rPr lang="en-US" sz="1600" b="1" dirty="0">
-                <a:solidFill>
-                  <a:srgbClr val="1B2A4A"/>
-                </a:solidFill>
-                <a:latin typeface="Yu Gothic" pitchFamily="34" charset="0"/>
-                <a:ea typeface="Yu Gothic" pitchFamily="34" charset="-122"/>
-                <a:cs typeface="Yu Gothic" pitchFamily="34" charset="-120"/>
-              </a:rPr>
-              <a:t>行動データの追加</a:t>
-            </a:r>
-            <a:endParaRPr lang="en-US" sz="1600" dirty="0"/>
-          </a:p>
-        </p:txBody>
-      </p:sp>
-      <p:sp>
-        <p:nvSpPr>
-          <p:cNvPr id="19" name="Text 17"/>
-          <p:cNvSpPr/>
-          <p:nvPr/>
-        </p:nvSpPr>
-        <p:spPr>
-          <a:xfrm>
-            <a:off x="8412480" y="2514600"/>
-            <a:ext cx="2743200" cy="1143000"/>
-          </a:xfrm>
-          <a:prstGeom prst="rect">
-            <a:avLst/>
-          </a:prstGeom>
-          <a:noFill/>
-          <a:ln/>
-        </p:spPr>
-        <p:txBody>
-          <a:bodyPr wrap="square" lIns="0" tIns="0" rIns="0" bIns="0" rtlCol="0" anchor="t"/>
-          <a:lstStyle/>
-          <a:p>
-            <a:pPr marL="342900" indent="-342900">
-              <a:spcAft>
-                <a:spcPts val="800"/>
-              </a:spcAft>
-              <a:buSzPct val="100000"/>
-              <a:buChar char="•"/>
-            </a:pPr>
-            <a:r>
-              <a:rPr lang="en-US" sz="1250" dirty="0">
+              <a:lnSpc>
+                <a:spcPct val="115000"/>
+              </a:lnSpc>
+              <a:buNone/>
+            </a:pPr>
+            <a:r>
+              <a:rPr lang="en-US" sz="1350" b="1" dirty="0">
+                <a:solidFill>
+                  <a:srgbClr val="8E0009"/>
+                </a:solidFill>
+                <a:latin typeface="Yu Gothic" pitchFamily="34" charset="0"/>
+                <a:ea typeface="Yu Gothic" pitchFamily="34" charset="-122"/>
+                <a:cs typeface="Yu Gothic" pitchFamily="34" charset="-120"/>
+              </a:rPr>
+              <a:t>なぜ、生成AIは行動データを持っていないのか
+</a:t>
+            </a:r>
+            <a:endParaRPr lang="en-US" sz="1350" dirty="0"/>
+          </a:p>
+          <a:p>
+            <a:pPr indent="0" marL="0">
+              <a:lnSpc>
+                <a:spcPct val="115000"/>
+              </a:lnSpc>
+              <a:buNone/>
+            </a:pPr>
+            <a:r>
+              <a:rPr lang="en-US" sz="1200" dirty="0">
                 <a:solidFill>
                   <a:srgbClr val="3A3A3A"/>
                 </a:solidFill>
@@ -1716,146 +1798,26 @@
                 <a:ea typeface="Yu Gothic" pitchFamily="34" charset="-122"/>
                 <a:cs typeface="Yu Gothic" pitchFamily="34" charset="-120"/>
               </a:rPr>
-              <a:t>dアカウント／dポイントの購買・決済履歴を活用</a:t>
-            </a:r>
-            <a:endParaRPr lang="en-US" sz="1250" dirty="0"/>
-          </a:p>
-          <a:p>
-            <a:pPr marL="342900" indent="-342900">
-              <a:spcAft>
-                <a:spcPts val="800"/>
-              </a:spcAft>
-              <a:buSzPct val="100000"/>
-              <a:buChar char="•"/>
-            </a:pPr>
-            <a:r>
-              <a:rPr lang="en-US" sz="1250" dirty="0">
-                <a:solidFill>
-                  <a:srgbClr val="3A3A3A"/>
-                </a:solidFill>
-                <a:latin typeface="Yu Gothic" pitchFamily="34" charset="0"/>
-                <a:ea typeface="Yu Gothic" pitchFamily="34" charset="-122"/>
-                <a:cs typeface="Yu Gothic" pitchFamily="34" charset="-120"/>
-              </a:rPr>
-              <a:t>ネット上のどこにも存在しない、ドコモだけの一次データ</a:t>
-            </a:r>
-            <a:endParaRPr lang="en-US" sz="1250" dirty="0"/>
-          </a:p>
-          <a:p>
-            <a:pPr marL="342900" indent="-342900">
-              <a:spcAft>
-                <a:spcPts val="800"/>
-              </a:spcAft>
-              <a:buSzPct val="100000"/>
-              <a:buChar char="•"/>
-            </a:pPr>
-            <a:r>
-              <a:rPr lang="en-US" sz="1250" dirty="0">
-                <a:solidFill>
-                  <a:srgbClr val="3A3A3A"/>
-                </a:solidFill>
-                <a:latin typeface="Yu Gothic" pitchFamily="34" charset="0"/>
-                <a:ea typeface="Yu Gothic" pitchFamily="34" charset="-122"/>
-                <a:cs typeface="Yu Gothic" pitchFamily="34" charset="-120"/>
-              </a:rPr>
-              <a:t>「その人」を理解した提案が可能になる</a:t>
-            </a:r>
-            <a:endParaRPr lang="en-US" sz="1250" dirty="0"/>
-          </a:p>
-        </p:txBody>
-      </p:sp>
-      <p:sp>
-        <p:nvSpPr>
-          <p:cNvPr id="20" name="Text 18"/>
-          <p:cNvSpPr/>
-          <p:nvPr/>
-        </p:nvSpPr>
-        <p:spPr>
-          <a:xfrm>
-            <a:off x="3794760" y="1691640"/>
-            <a:ext cx="457200" cy="2194560"/>
-          </a:xfrm>
-          <a:prstGeom prst="rect">
-            <a:avLst/>
-          </a:prstGeom>
-          <a:noFill/>
-          <a:ln/>
-        </p:spPr>
-        <p:txBody>
-          <a:bodyPr wrap="square" lIns="0" tIns="0" rIns="0" bIns="0" rtlCol="0" anchor="ctr"/>
-          <a:lstStyle/>
-          <a:p>
-            <a:pPr algn="ctr" indent="0" marL="0">
-              <a:buNone/>
-            </a:pPr>
-            <a:r>
-              <a:rPr lang="en-US" sz="2800" b="1" dirty="0">
-                <a:solidFill>
-                  <a:srgbClr val="6E6E6E"/>
-                </a:solidFill>
-                <a:latin typeface="Yu Gothic" pitchFamily="34" charset="0"/>
-                <a:ea typeface="Yu Gothic" pitchFamily="34" charset="-122"/>
-                <a:cs typeface="Yu Gothic" pitchFamily="34" charset="-120"/>
-              </a:rPr>
-              <a:t>→</a:t>
-            </a:r>
-            <a:endParaRPr lang="en-US" sz="2800" dirty="0"/>
-          </a:p>
-        </p:txBody>
-      </p:sp>
-      <p:sp>
-        <p:nvSpPr>
-          <p:cNvPr id="21" name="Text 19"/>
-          <p:cNvSpPr/>
-          <p:nvPr/>
-        </p:nvSpPr>
-        <p:spPr>
-          <a:xfrm>
-            <a:off x="7635240" y="1691640"/>
-            <a:ext cx="457200" cy="2194560"/>
-          </a:xfrm>
-          <a:prstGeom prst="rect">
-            <a:avLst/>
-          </a:prstGeom>
-          <a:noFill/>
-          <a:ln/>
-        </p:spPr>
-        <p:txBody>
-          <a:bodyPr wrap="square" lIns="0" tIns="0" rIns="0" bIns="0" rtlCol="0" anchor="ctr"/>
-          <a:lstStyle/>
-          <a:p>
-            <a:pPr algn="ctr" indent="0" marL="0">
-              <a:buNone/>
-            </a:pPr>
-            <a:r>
-              <a:rPr lang="en-US" sz="2800" b="1" dirty="0">
-                <a:solidFill>
-                  <a:srgbClr val="6E6E6E"/>
-                </a:solidFill>
-                <a:latin typeface="Yu Gothic" pitchFamily="34" charset="0"/>
-                <a:ea typeface="Yu Gothic" pitchFamily="34" charset="-122"/>
-                <a:cs typeface="Yu Gothic" pitchFamily="34" charset="-120"/>
-              </a:rPr>
-              <a:t>→</a:t>
-            </a:r>
-            <a:endParaRPr lang="en-US" sz="2800" dirty="0"/>
-          </a:p>
-        </p:txBody>
-      </p:sp>
-      <p:sp>
-        <p:nvSpPr>
-          <p:cNvPr id="22" name="Shape 20"/>
-          <p:cNvSpPr/>
-          <p:nvPr/>
-        </p:nvSpPr>
-        <p:spPr>
-          <a:xfrm>
-            <a:off x="457200" y="4160520"/>
-            <a:ext cx="11277295" cy="1554480"/>
+              <a:t>生成AIはインターネット上のテキストを学習している。しかし、日常の購買・来店・移動といった行動は、そもそもテキスト化されてネット上に存在しない。</a:t>
+            </a:r>
+            <a:endParaRPr lang="en-US" sz="1350" dirty="0"/>
+          </a:p>
+        </p:txBody>
+      </p:sp>
+      <p:sp>
+        <p:nvSpPr>
+          <p:cNvPr id="19" name="Shape 17"/>
+          <p:cNvSpPr/>
+          <p:nvPr/>
+        </p:nvSpPr>
+        <p:spPr>
+          <a:xfrm>
+            <a:off x="457200" y="4983480"/>
+            <a:ext cx="11277295" cy="1051560"/>
           </a:xfrm>
           <a:prstGeom prst="roundRect">
             <a:avLst>
-              <a:gd name="adj" fmla="val 4706"/>
+              <a:gd name="adj" fmla="val 6957"/>
             </a:avLst>
           </a:prstGeom>
           <a:solidFill>
@@ -1866,14 +1828,14 @@
       </p:sp>
       <p:sp>
         <p:nvSpPr>
-          <p:cNvPr id="23" name="Text 21"/>
-          <p:cNvSpPr/>
-          <p:nvPr/>
-        </p:nvSpPr>
-        <p:spPr>
-          <a:xfrm>
-            <a:off x="822960" y="4343400"/>
-            <a:ext cx="10545775" cy="1188720"/>
+          <p:cNvPr id="20" name="Text 18"/>
+          <p:cNvSpPr/>
+          <p:nvPr/>
+        </p:nvSpPr>
+        <p:spPr>
+          <a:xfrm>
+            <a:off x="822960" y="5120640"/>
+            <a:ext cx="10545775" cy="777240"/>
           </a:xfrm>
           <a:prstGeom prst="rect">
             <a:avLst/>
@@ -1887,12 +1849,12 @@
           <a:p>
             <a:pPr indent="0" marL="0">
               <a:lnSpc>
-                <a:spcPct val="125000"/>
+                <a:spcPct val="115000"/>
               </a:lnSpc>
               <a:buNone/>
             </a:pPr>
             <a:r>
-              <a:rPr lang="en-US" sz="1700" b="1" dirty="0">
+              <a:rPr lang="en-US" sz="1500" b="1" dirty="0">
                 <a:solidFill>
                   <a:srgbClr val="FFFFFF"/>
                 </a:solidFill>
@@ -1903,17 +1865,17 @@
               <a:t>行動データ＝生成AIの民主化のカギ
 </a:t>
             </a:r>
-            <a:endParaRPr lang="en-US" sz="1700" dirty="0"/>
+            <a:endParaRPr lang="en-US" sz="1500" dirty="0"/>
           </a:p>
           <a:p>
             <a:pPr indent="0" marL="0">
               <a:lnSpc>
-                <a:spcPct val="125000"/>
+                <a:spcPct val="115000"/>
               </a:lnSpc>
               <a:buNone/>
             </a:pPr>
             <a:r>
-              <a:rPr lang="en-US" sz="1350" dirty="0">
+              <a:rPr lang="en-US" sz="1250" dirty="0">
                 <a:solidFill>
                   <a:srgbClr val="D8DCE8"/>
                 </a:solidFill>
@@ -1921,15 +1883,15 @@
                 <a:ea typeface="Yu Gothic" pitchFamily="34" charset="-122"/>
                 <a:cs typeface="Yu Gothic" pitchFamily="34" charset="-120"/>
               </a:rPr>
-              <a:t>プロンプト入力が苦手な、ITリテラシーの低い人でも、行動履歴から自動的に情報が渡れば生成AIの恩恵を受けられる。ここが、OpenAIやClaudeに対するドコモの決定的な差別化資源になる。</a:t>
-            </a:r>
-            <a:endParaRPr lang="en-US" sz="1700" dirty="0"/>
-          </a:p>
-        </p:txBody>
-      </p:sp>
-      <p:sp>
-        <p:nvSpPr>
-          <p:cNvPr id="24" name="Text 22"/>
+              <a:t>dアカウント／dポイントを通じて数千万人分の行動データを蓄積するドコモだからこそ、誰もが生成AIの恩恵を受けられる社会を実現できる。ここが、OpenAIやClaudeに対する決定的な差別化資源になる。</a:t>
+            </a:r>
+            <a:endParaRPr lang="en-US" sz="1500" dirty="0"/>
+          </a:p>
+        </p:txBody>
+      </p:sp>
+      <p:sp>
+        <p:nvSpPr>
+          <p:cNvPr id="21" name="Text 19"/>
           <p:cNvSpPr/>
           <p:nvPr/>
         </p:nvSpPr>
@@ -1968,7 +1930,7 @@
       </p:sp>
       <p:sp>
         <p:nvSpPr>
-          <p:cNvPr id="25" name="Shape 23"/>
+          <p:cNvPr id="22" name="Shape 20"/>
           <p:cNvSpPr/>
           <p:nvPr/>
         </p:nvSpPr>
@@ -1988,7 +1950,7 @@
       </p:sp>
       <p:sp>
         <p:nvSpPr>
-          <p:cNvPr id="26" name="Text 24"/>
+          <p:cNvPr id="23" name="Text 21"/>
           <p:cNvSpPr/>
           <p:nvPr/>
         </p:nvSpPr>
@@ -4433,6 +4395,1048 @@
                 <a:cs typeface="Yu Gothic" pitchFamily="34" charset="-120"/>
               </a:rPr>
               <a:t>3</a:t>
+            </a:r>
+            <a:endParaRPr lang="en-US" sz="1100" dirty="0"/>
+          </a:p>
+        </p:txBody>
+      </p:sp>
+    </p:spTree>
+  </p:cSld>
+  <p:clrMapOvr>
+    <a:masterClrMapping/>
+  </p:clrMapOvr>
+</p:sld>
+</file>
+
+<file path=ppt/slides/slide4.xml><?xml version="1.0" encoding="utf-8"?>
+<p:sld xmlns:a="http://schemas.openxmlformats.org/drawingml/2006/main" xmlns:r="http://schemas.openxmlformats.org/officeDocument/2006/relationships" xmlns:p="http://schemas.openxmlformats.org/presentationml/2006/main">
+  <p:cSld name="Slide 4">
+    <p:bg>
+      <p:bgPr>
+        <a:solidFill>
+          <a:srgbClr val="FFFFFF"/>
+        </a:solidFill>
+      </p:bgPr>
+    </p:bg>
+    <p:spTree>
+      <p:nvGrpSpPr>
+        <p:cNvPr id="1" name=""/>
+        <p:cNvGrpSpPr/>
+        <p:nvPr/>
+      </p:nvGrpSpPr>
+      <p:grpSpPr>
+        <a:xfrm>
+          <a:off x="0" y="0"/>
+          <a:ext cx="0" cy="0"/>
+          <a:chOff x="0" y="0"/>
+          <a:chExt cx="0" cy="0"/>
+        </a:xfrm>
+      </p:grpSpPr>
+      <p:sp>
+        <p:nvSpPr>
+          <p:cNvPr id="2" name="Text 0"/>
+          <p:cNvSpPr/>
+          <p:nvPr/>
+        </p:nvSpPr>
+        <p:spPr>
+          <a:xfrm>
+            <a:off x="457200" y="320040"/>
+            <a:ext cx="9144000" cy="274320"/>
+          </a:xfrm>
+          <a:prstGeom prst="rect">
+            <a:avLst/>
+          </a:prstGeom>
+          <a:noFill/>
+          <a:ln/>
+        </p:spPr>
+        <p:txBody>
+          <a:bodyPr wrap="square" lIns="0" tIns="0" rIns="0" bIns="0" rtlCol="0" anchor="ctr"/>
+          <a:lstStyle/>
+          <a:p>
+            <a:pPr indent="0" marL="0">
+              <a:buNone/>
+            </a:pPr>
+            <a:r>
+              <a:rPr lang="en-US" sz="1200" b="1" dirty="0">
+                <a:solidFill>
+                  <a:srgbClr val="C7000F"/>
+                </a:solidFill>
+                <a:latin typeface="Yu Gothic" pitchFamily="34" charset="0"/>
+                <a:ea typeface="Yu Gothic" pitchFamily="34" charset="-122"/>
+                <a:cs typeface="Yu Gothic" pitchFamily="34" charset="-120"/>
+              </a:rPr>
+              <a:t>補強④ ｜ 新事業のリスク</a:t>
+            </a:r>
+            <a:endParaRPr lang="en-US" sz="1200" dirty="0"/>
+          </a:p>
+        </p:txBody>
+      </p:sp>
+      <p:sp>
+        <p:nvSpPr>
+          <p:cNvPr id="3" name="Text 1"/>
+          <p:cNvSpPr/>
+          <p:nvPr/>
+        </p:nvSpPr>
+        <p:spPr>
+          <a:xfrm>
+            <a:off x="457200" y="566928"/>
+            <a:ext cx="11277295" cy="502920"/>
+          </a:xfrm>
+          <a:prstGeom prst="rect">
+            <a:avLst/>
+          </a:prstGeom>
+          <a:noFill/>
+          <a:ln/>
+        </p:spPr>
+        <p:txBody>
+          <a:bodyPr wrap="square" lIns="0" tIns="0" rIns="0" bIns="0" rtlCol="0" anchor="ctr"/>
+          <a:lstStyle/>
+          <a:p>
+            <a:pPr indent="0" marL="0">
+              <a:buNone/>
+            </a:pPr>
+            <a:r>
+              <a:rPr lang="en-US" sz="3000" b="1" dirty="0">
+                <a:solidFill>
+                  <a:srgbClr val="1B2A4A"/>
+                </a:solidFill>
+                <a:latin typeface="Yu Gothic" pitchFamily="34" charset="0"/>
+                <a:ea typeface="Yu Gothic" pitchFamily="34" charset="-122"/>
+                <a:cs typeface="Yu Gothic" pitchFamily="34" charset="-120"/>
+              </a:rPr>
+              <a:t>新事業のリスク</a:t>
+            </a:r>
+            <a:endParaRPr lang="en-US" sz="3000" dirty="0"/>
+          </a:p>
+        </p:txBody>
+      </p:sp>
+      <p:sp>
+        <p:nvSpPr>
+          <p:cNvPr id="4" name="Text 2"/>
+          <p:cNvSpPr/>
+          <p:nvPr/>
+        </p:nvSpPr>
+        <p:spPr>
+          <a:xfrm>
+            <a:off x="457200" y="1097280"/>
+            <a:ext cx="11277295" cy="457200"/>
+          </a:xfrm>
+          <a:prstGeom prst="rect">
+            <a:avLst/>
+          </a:prstGeom>
+          <a:noFill/>
+          <a:ln/>
+        </p:spPr>
+        <p:txBody>
+          <a:bodyPr wrap="square" lIns="0" tIns="0" rIns="0" bIns="0" rtlCol="0" anchor="ctr"/>
+          <a:lstStyle/>
+          <a:p>
+            <a:pPr indent="0" marL="0">
+              <a:buNone/>
+            </a:pPr>
+            <a:r>
+              <a:rPr lang="en-US" sz="1500" dirty="0">
+                <a:solidFill>
+                  <a:srgbClr val="3A3A3A"/>
+                </a:solidFill>
+                <a:latin typeface="Yu Gothic" pitchFamily="34" charset="0"/>
+                <a:ea typeface="Yu Gothic" pitchFamily="34" charset="-122"/>
+                <a:cs typeface="Yu Gothic" pitchFamily="34" charset="-120"/>
+              </a:rPr>
+              <a:t>dポイント・ホワイトレーベルを進める上で、想定される4つのリスク</a:t>
+            </a:r>
+            <a:endParaRPr lang="en-US" sz="1500" dirty="0"/>
+          </a:p>
+        </p:txBody>
+      </p:sp>
+      <p:sp>
+        <p:nvSpPr>
+          <p:cNvPr id="5" name="Shape 3"/>
+          <p:cNvSpPr/>
+          <p:nvPr/>
+        </p:nvSpPr>
+        <p:spPr>
+          <a:xfrm>
+            <a:off x="457200" y="1691640"/>
+            <a:ext cx="5486400" cy="1554480"/>
+          </a:xfrm>
+          <a:prstGeom prst="roundRect">
+            <a:avLst>
+              <a:gd name="adj" fmla="val 4706"/>
+            </a:avLst>
+          </a:prstGeom>
+          <a:solidFill>
+            <a:srgbClr val="FAFAFA"/>
+          </a:solidFill>
+          <a:ln/>
+          <a:effectLst>
+            <a:outerShdw sx="100000" sy="100000" kx="0" ky="0" algn="bl" rotWithShape="0" blurRad="76200" dist="25400" dir="5400000">
+              <a:srgbClr val="000000">
+                <a:alpha val="12000"/>
+              </a:srgbClr>
+            </a:outerShdw>
+          </a:effectLst>
+        </p:spPr>
+      </p:sp>
+      <p:sp>
+        <p:nvSpPr>
+          <p:cNvPr id="6" name="Shape 4"/>
+          <p:cNvSpPr/>
+          <p:nvPr/>
+        </p:nvSpPr>
+        <p:spPr>
+          <a:xfrm>
+            <a:off x="685800" y="1920240"/>
+            <a:ext cx="457200" cy="457200"/>
+          </a:xfrm>
+          <a:prstGeom prst="ellipse">
+            <a:avLst/>
+          </a:prstGeom>
+          <a:solidFill>
+            <a:srgbClr val="C7000F"/>
+          </a:solidFill>
+          <a:ln/>
+        </p:spPr>
+      </p:sp>
+      <p:sp>
+        <p:nvSpPr>
+          <p:cNvPr id="7" name="Text 5"/>
+          <p:cNvSpPr/>
+          <p:nvPr/>
+        </p:nvSpPr>
+        <p:spPr>
+          <a:xfrm>
+            <a:off x="685800" y="1920240"/>
+            <a:ext cx="457200" cy="457200"/>
+          </a:xfrm>
+          <a:prstGeom prst="rect">
+            <a:avLst/>
+          </a:prstGeom>
+          <a:noFill/>
+          <a:ln/>
+        </p:spPr>
+        <p:txBody>
+          <a:bodyPr wrap="square" lIns="0" tIns="0" rIns="0" bIns="0" rtlCol="0" anchor="ctr"/>
+          <a:lstStyle/>
+          <a:p>
+            <a:pPr algn="ctr" indent="0" marL="0">
+              <a:buNone/>
+            </a:pPr>
+            <a:endParaRPr lang="en-US" sz="1600" dirty="0"/>
+          </a:p>
+        </p:txBody>
+      </p:sp>
+      <p:sp>
+        <p:nvSpPr>
+          <p:cNvPr id="8" name="Text 6"/>
+          <p:cNvSpPr/>
+          <p:nvPr/>
+        </p:nvSpPr>
+        <p:spPr>
+          <a:xfrm>
+            <a:off x="1280160" y="1874520"/>
+            <a:ext cx="4434840" cy="457200"/>
+          </a:xfrm>
+          <a:prstGeom prst="rect">
+            <a:avLst/>
+          </a:prstGeom>
+          <a:noFill/>
+          <a:ln/>
+        </p:spPr>
+        <p:txBody>
+          <a:bodyPr wrap="square" lIns="0" tIns="0" rIns="0" bIns="0" rtlCol="0" anchor="ctr"/>
+          <a:lstStyle/>
+          <a:p>
+            <a:pPr indent="0" marL="0">
+              <a:buNone/>
+            </a:pPr>
+            <a:r>
+              <a:rPr lang="en-US" sz="1450" b="1" dirty="0">
+                <a:solidFill>
+                  <a:srgbClr val="1B2A4A"/>
+                </a:solidFill>
+                <a:latin typeface="Yu Gothic" pitchFamily="34" charset="0"/>
+                <a:ea typeface="Yu Gothic" pitchFamily="34" charset="-122"/>
+                <a:cs typeface="Yu Gothic" pitchFamily="34" charset="-120"/>
+              </a:rPr>
+              <a:t>データ・プライバシーへの懸念</a:t>
+            </a:r>
+            <a:endParaRPr lang="en-US" sz="1450" dirty="0"/>
+          </a:p>
+        </p:txBody>
+      </p:sp>
+      <p:sp>
+        <p:nvSpPr>
+          <p:cNvPr id="9" name="Text 7"/>
+          <p:cNvSpPr/>
+          <p:nvPr/>
+        </p:nvSpPr>
+        <p:spPr>
+          <a:xfrm>
+            <a:off x="731520" y="2423160"/>
+            <a:ext cx="4937760" cy="640080"/>
+          </a:xfrm>
+          <a:prstGeom prst="rect">
+            <a:avLst/>
+          </a:prstGeom>
+          <a:noFill/>
+          <a:ln/>
+        </p:spPr>
+        <p:txBody>
+          <a:bodyPr wrap="square" lIns="0" tIns="0" rIns="0" bIns="0" rtlCol="0" anchor="t"/>
+          <a:lstStyle/>
+          <a:p>
+            <a:pPr marL="342900" indent="-342900">
+              <a:spcAft>
+                <a:spcPts val="600"/>
+              </a:spcAft>
+              <a:buSzPct val="100000"/>
+              <a:buChar char="•"/>
+            </a:pPr>
+            <a:r>
+              <a:rPr lang="en-US" sz="1200" dirty="0">
+                <a:solidFill>
+                  <a:srgbClr val="3A3A3A"/>
+                </a:solidFill>
+                <a:latin typeface="Yu Gothic" pitchFamily="34" charset="0"/>
+                <a:ea typeface="Yu Gothic" pitchFamily="34" charset="-122"/>
+                <a:cs typeface="Yu Gothic" pitchFamily="34" charset="-120"/>
+              </a:rPr>
+              <a:t>行動データの収集・活用に対する個人情報保護法対応の負荷</a:t>
+            </a:r>
+            <a:endParaRPr lang="en-US" sz="1200" dirty="0"/>
+          </a:p>
+          <a:p>
+            <a:pPr marL="342900" indent="-342900">
+              <a:spcAft>
+                <a:spcPts val="600"/>
+              </a:spcAft>
+              <a:buSzPct val="100000"/>
+              <a:buChar char="•"/>
+            </a:pPr>
+            <a:r>
+              <a:rPr lang="en-US" sz="1200" dirty="0">
+                <a:solidFill>
+                  <a:srgbClr val="3A3A3A"/>
+                </a:solidFill>
+                <a:latin typeface="Yu Gothic" pitchFamily="34" charset="0"/>
+                <a:ea typeface="Yu Gothic" pitchFamily="34" charset="-122"/>
+                <a:cs typeface="Yu Gothic" pitchFamily="34" charset="-120"/>
+              </a:rPr>
+              <a:t>顧客の抵抗感や「監視されている」という炎上リスク</a:t>
+            </a:r>
+            <a:endParaRPr lang="en-US" sz="1200" dirty="0"/>
+          </a:p>
+        </p:txBody>
+      </p:sp>
+      <p:sp>
+        <p:nvSpPr>
+          <p:cNvPr id="10" name="Shape 8"/>
+          <p:cNvSpPr/>
+          <p:nvPr/>
+        </p:nvSpPr>
+        <p:spPr>
+          <a:xfrm>
+            <a:off x="6248095" y="1691640"/>
+            <a:ext cx="5486400" cy="1554480"/>
+          </a:xfrm>
+          <a:prstGeom prst="roundRect">
+            <a:avLst>
+              <a:gd name="adj" fmla="val 4706"/>
+            </a:avLst>
+          </a:prstGeom>
+          <a:solidFill>
+            <a:srgbClr val="FAFAFA"/>
+          </a:solidFill>
+          <a:ln/>
+          <a:effectLst>
+            <a:outerShdw sx="100000" sy="100000" kx="0" ky="0" algn="bl" rotWithShape="0" blurRad="76200" dist="25400" dir="5400000">
+              <a:srgbClr val="000000">
+                <a:alpha val="12000"/>
+              </a:srgbClr>
+            </a:outerShdw>
+          </a:effectLst>
+        </p:spPr>
+      </p:sp>
+      <p:sp>
+        <p:nvSpPr>
+          <p:cNvPr id="11" name="Shape 9"/>
+          <p:cNvSpPr/>
+          <p:nvPr/>
+        </p:nvSpPr>
+        <p:spPr>
+          <a:xfrm>
+            <a:off x="6476695" y="1920240"/>
+            <a:ext cx="457200" cy="457200"/>
+          </a:xfrm>
+          <a:prstGeom prst="ellipse">
+            <a:avLst/>
+          </a:prstGeom>
+          <a:solidFill>
+            <a:srgbClr val="C7000F"/>
+          </a:solidFill>
+          <a:ln/>
+        </p:spPr>
+      </p:sp>
+      <p:sp>
+        <p:nvSpPr>
+          <p:cNvPr id="12" name="Text 10"/>
+          <p:cNvSpPr/>
+          <p:nvPr/>
+        </p:nvSpPr>
+        <p:spPr>
+          <a:xfrm>
+            <a:off x="6476695" y="1920240"/>
+            <a:ext cx="457200" cy="457200"/>
+          </a:xfrm>
+          <a:prstGeom prst="rect">
+            <a:avLst/>
+          </a:prstGeom>
+          <a:noFill/>
+          <a:ln/>
+        </p:spPr>
+        <p:txBody>
+          <a:bodyPr wrap="square" lIns="0" tIns="0" rIns="0" bIns="0" rtlCol="0" anchor="ctr"/>
+          <a:lstStyle/>
+          <a:p>
+            <a:pPr algn="ctr" indent="0" marL="0">
+              <a:buNone/>
+            </a:pPr>
+            <a:endParaRPr lang="en-US" sz="1600" dirty="0"/>
+          </a:p>
+        </p:txBody>
+      </p:sp>
+      <p:sp>
+        <p:nvSpPr>
+          <p:cNvPr id="13" name="Text 11"/>
+          <p:cNvSpPr/>
+          <p:nvPr/>
+        </p:nvSpPr>
+        <p:spPr>
+          <a:xfrm>
+            <a:off x="7071055" y="1874520"/>
+            <a:ext cx="4434840" cy="457200"/>
+          </a:xfrm>
+          <a:prstGeom prst="rect">
+            <a:avLst/>
+          </a:prstGeom>
+          <a:noFill/>
+          <a:ln/>
+        </p:spPr>
+        <p:txBody>
+          <a:bodyPr wrap="square" lIns="0" tIns="0" rIns="0" bIns="0" rtlCol="0" anchor="ctr"/>
+          <a:lstStyle/>
+          <a:p>
+            <a:pPr indent="0" marL="0">
+              <a:buNone/>
+            </a:pPr>
+            <a:r>
+              <a:rPr lang="en-US" sz="1450" b="1" dirty="0">
+                <a:solidFill>
+                  <a:srgbClr val="1B2A4A"/>
+                </a:solidFill>
+                <a:latin typeface="Yu Gothic" pitchFamily="34" charset="0"/>
+                <a:ea typeface="Yu Gothic" pitchFamily="34" charset="-122"/>
+                <a:cs typeface="Yu Gothic" pitchFamily="34" charset="-120"/>
+              </a:rPr>
+              <a:t>複層ポイント設計による顧客の混乱</a:t>
+            </a:r>
+            <a:endParaRPr lang="en-US" sz="1450" dirty="0"/>
+          </a:p>
+        </p:txBody>
+      </p:sp>
+      <p:sp>
+        <p:nvSpPr>
+          <p:cNvPr id="14" name="Text 12"/>
+          <p:cNvSpPr/>
+          <p:nvPr/>
+        </p:nvSpPr>
+        <p:spPr>
+          <a:xfrm>
+            <a:off x="6522415" y="2423160"/>
+            <a:ext cx="4937760" cy="640080"/>
+          </a:xfrm>
+          <a:prstGeom prst="rect">
+            <a:avLst/>
+          </a:prstGeom>
+          <a:noFill/>
+          <a:ln/>
+        </p:spPr>
+        <p:txBody>
+          <a:bodyPr wrap="square" lIns="0" tIns="0" rIns="0" bIns="0" rtlCol="0" anchor="t"/>
+          <a:lstStyle/>
+          <a:p>
+            <a:pPr marL="342900" indent="-342900">
+              <a:spcAft>
+                <a:spcPts val="600"/>
+              </a:spcAft>
+              <a:buSzPct val="100000"/>
+              <a:buChar char="•"/>
+            </a:pPr>
+            <a:r>
+              <a:rPr lang="en-US" sz="1200" dirty="0">
+                <a:solidFill>
+                  <a:srgbClr val="3A3A3A"/>
+                </a:solidFill>
+                <a:latin typeface="Yu Gothic" pitchFamily="34" charset="0"/>
+                <a:ea typeface="Yu Gothic" pitchFamily="34" charset="-122"/>
+                <a:cs typeface="Yu Gothic" pitchFamily="34" charset="-120"/>
+              </a:rPr>
+              <a:t>「通常dポイント」との違いが伝わりにくい</a:t>
+            </a:r>
+            <a:endParaRPr lang="en-US" sz="1200" dirty="0"/>
+          </a:p>
+          <a:p>
+            <a:pPr marL="342900" indent="-342900">
+              <a:spcAft>
+                <a:spcPts val="600"/>
+              </a:spcAft>
+              <a:buSzPct val="100000"/>
+              <a:buChar char="•"/>
+            </a:pPr>
+            <a:r>
+              <a:rPr lang="en-US" sz="1200" dirty="0">
+                <a:solidFill>
+                  <a:srgbClr val="3A3A3A"/>
+                </a:solidFill>
+                <a:latin typeface="Yu Gothic" pitchFamily="34" charset="0"/>
+                <a:ea typeface="Yu Gothic" pitchFamily="34" charset="-122"/>
+                <a:cs typeface="Yu Gothic" pitchFamily="34" charset="-120"/>
+              </a:rPr>
+              <a:t>既存の期間・用途限定ポイントも浸透していない実態がある</a:t>
+            </a:r>
+            <a:endParaRPr lang="en-US" sz="1200" dirty="0"/>
+          </a:p>
+        </p:txBody>
+      </p:sp>
+      <p:sp>
+        <p:nvSpPr>
+          <p:cNvPr id="15" name="Shape 13"/>
+          <p:cNvSpPr/>
+          <p:nvPr/>
+        </p:nvSpPr>
+        <p:spPr>
+          <a:xfrm>
+            <a:off x="457200" y="3429000"/>
+            <a:ext cx="5486400" cy="1554480"/>
+          </a:xfrm>
+          <a:prstGeom prst="roundRect">
+            <a:avLst>
+              <a:gd name="adj" fmla="val 4706"/>
+            </a:avLst>
+          </a:prstGeom>
+          <a:solidFill>
+            <a:srgbClr val="FAFAFA"/>
+          </a:solidFill>
+          <a:ln/>
+          <a:effectLst>
+            <a:outerShdw sx="100000" sy="100000" kx="0" ky="0" algn="bl" rotWithShape="0" blurRad="76200" dist="25400" dir="5400000">
+              <a:srgbClr val="000000">
+                <a:alpha val="12000"/>
+              </a:srgbClr>
+            </a:outerShdw>
+          </a:effectLst>
+        </p:spPr>
+      </p:sp>
+      <p:sp>
+        <p:nvSpPr>
+          <p:cNvPr id="16" name="Shape 14"/>
+          <p:cNvSpPr/>
+          <p:nvPr/>
+        </p:nvSpPr>
+        <p:spPr>
+          <a:xfrm>
+            <a:off x="685800" y="3657600"/>
+            <a:ext cx="457200" cy="457200"/>
+          </a:xfrm>
+          <a:prstGeom prst="ellipse">
+            <a:avLst/>
+          </a:prstGeom>
+          <a:solidFill>
+            <a:srgbClr val="C7000F"/>
+          </a:solidFill>
+          <a:ln/>
+        </p:spPr>
+      </p:sp>
+      <p:sp>
+        <p:nvSpPr>
+          <p:cNvPr id="17" name="Text 15"/>
+          <p:cNvSpPr/>
+          <p:nvPr/>
+        </p:nvSpPr>
+        <p:spPr>
+          <a:xfrm>
+            <a:off x="685800" y="3657600"/>
+            <a:ext cx="457200" cy="457200"/>
+          </a:xfrm>
+          <a:prstGeom prst="rect">
+            <a:avLst/>
+          </a:prstGeom>
+          <a:noFill/>
+          <a:ln/>
+        </p:spPr>
+        <p:txBody>
+          <a:bodyPr wrap="square" lIns="0" tIns="0" rIns="0" bIns="0" rtlCol="0" anchor="ctr"/>
+          <a:lstStyle/>
+          <a:p>
+            <a:pPr algn="ctr" indent="0" marL="0">
+              <a:buNone/>
+            </a:pPr>
+            <a:endParaRPr lang="en-US" sz="1600" dirty="0"/>
+          </a:p>
+        </p:txBody>
+      </p:sp>
+      <p:sp>
+        <p:nvSpPr>
+          <p:cNvPr id="18" name="Text 16"/>
+          <p:cNvSpPr/>
+          <p:nvPr/>
+        </p:nvSpPr>
+        <p:spPr>
+          <a:xfrm>
+            <a:off x="1280160" y="3611880"/>
+            <a:ext cx="4434840" cy="457200"/>
+          </a:xfrm>
+          <a:prstGeom prst="rect">
+            <a:avLst/>
+          </a:prstGeom>
+          <a:noFill/>
+          <a:ln/>
+        </p:spPr>
+        <p:txBody>
+          <a:bodyPr wrap="square" lIns="0" tIns="0" rIns="0" bIns="0" rtlCol="0" anchor="ctr"/>
+          <a:lstStyle/>
+          <a:p>
+            <a:pPr indent="0" marL="0">
+              <a:buNone/>
+            </a:pPr>
+            <a:r>
+              <a:rPr lang="en-US" sz="1450" b="1" dirty="0">
+                <a:solidFill>
+                  <a:srgbClr val="1B2A4A"/>
+                </a:solidFill>
+                <a:latin typeface="Yu Gothic" pitchFamily="34" charset="0"/>
+                <a:ea typeface="Yu Gothic" pitchFamily="34" charset="-122"/>
+                <a:cs typeface="Yu Gothic" pitchFamily="34" charset="-120"/>
+              </a:rPr>
+              <a:t>交換レート設計の板挟み</a:t>
+            </a:r>
+            <a:endParaRPr lang="en-US" sz="1450" dirty="0"/>
+          </a:p>
+        </p:txBody>
+      </p:sp>
+      <p:sp>
+        <p:nvSpPr>
+          <p:cNvPr id="19" name="Text 17"/>
+          <p:cNvSpPr/>
+          <p:nvPr/>
+        </p:nvSpPr>
+        <p:spPr>
+          <a:xfrm>
+            <a:off x="731520" y="4160520"/>
+            <a:ext cx="4937760" cy="640080"/>
+          </a:xfrm>
+          <a:prstGeom prst="rect">
+            <a:avLst/>
+          </a:prstGeom>
+          <a:noFill/>
+          <a:ln/>
+        </p:spPr>
+        <p:txBody>
+          <a:bodyPr wrap="square" lIns="0" tIns="0" rIns="0" bIns="0" rtlCol="0" anchor="t"/>
+          <a:lstStyle/>
+          <a:p>
+            <a:pPr marL="342900" indent="-342900">
+              <a:spcAft>
+                <a:spcPts val="600"/>
+              </a:spcAft>
+              <a:buSzPct val="100000"/>
+              <a:buChar char="•"/>
+            </a:pPr>
+            <a:r>
+              <a:rPr lang="en-US" sz="1200" dirty="0">
+                <a:solidFill>
+                  <a:srgbClr val="3A3A3A"/>
+                </a:solidFill>
+                <a:latin typeface="Yu Gothic" pitchFamily="34" charset="0"/>
+                <a:ea typeface="Yu Gothic" pitchFamily="34" charset="-122"/>
+                <a:cs typeface="Yu Gothic" pitchFamily="34" charset="-120"/>
+              </a:rPr>
+              <a:t>レートが高すぎれば囲い込み効果が毀損しパートナーが離反</a:t>
+            </a:r>
+            <a:endParaRPr lang="en-US" sz="1200" dirty="0"/>
+          </a:p>
+          <a:p>
+            <a:pPr marL="342900" indent="-342900">
+              <a:spcAft>
+                <a:spcPts val="600"/>
+              </a:spcAft>
+              <a:buSzPct val="100000"/>
+              <a:buChar char="•"/>
+            </a:pPr>
+            <a:r>
+              <a:rPr lang="en-US" sz="1200" dirty="0">
+                <a:solidFill>
+                  <a:srgbClr val="3A3A3A"/>
+                </a:solidFill>
+                <a:latin typeface="Yu Gothic" pitchFamily="34" charset="0"/>
+                <a:ea typeface="Yu Gothic" pitchFamily="34" charset="-122"/>
+                <a:cs typeface="Yu Gothic" pitchFamily="34" charset="-120"/>
+              </a:rPr>
+              <a:t>低すぎれば評判が悪化し、収益も不足する</a:t>
+            </a:r>
+            <a:endParaRPr lang="en-US" sz="1200" dirty="0"/>
+          </a:p>
+        </p:txBody>
+      </p:sp>
+      <p:sp>
+        <p:nvSpPr>
+          <p:cNvPr id="20" name="Shape 18"/>
+          <p:cNvSpPr/>
+          <p:nvPr/>
+        </p:nvSpPr>
+        <p:spPr>
+          <a:xfrm>
+            <a:off x="6248095" y="3429000"/>
+            <a:ext cx="5486400" cy="1554480"/>
+          </a:xfrm>
+          <a:prstGeom prst="roundRect">
+            <a:avLst>
+              <a:gd name="adj" fmla="val 4706"/>
+            </a:avLst>
+          </a:prstGeom>
+          <a:solidFill>
+            <a:srgbClr val="FAFAFA"/>
+          </a:solidFill>
+          <a:ln/>
+          <a:effectLst>
+            <a:outerShdw sx="100000" sy="100000" kx="0" ky="0" algn="bl" rotWithShape="0" blurRad="76200" dist="25400" dir="5400000">
+              <a:srgbClr val="000000">
+                <a:alpha val="12000"/>
+              </a:srgbClr>
+            </a:outerShdw>
+          </a:effectLst>
+        </p:spPr>
+      </p:sp>
+      <p:sp>
+        <p:nvSpPr>
+          <p:cNvPr id="21" name="Shape 19"/>
+          <p:cNvSpPr/>
+          <p:nvPr/>
+        </p:nvSpPr>
+        <p:spPr>
+          <a:xfrm>
+            <a:off x="6476695" y="3657600"/>
+            <a:ext cx="457200" cy="457200"/>
+          </a:xfrm>
+          <a:prstGeom prst="ellipse">
+            <a:avLst/>
+          </a:prstGeom>
+          <a:solidFill>
+            <a:srgbClr val="C7000F"/>
+          </a:solidFill>
+          <a:ln/>
+        </p:spPr>
+      </p:sp>
+      <p:sp>
+        <p:nvSpPr>
+          <p:cNvPr id="22" name="Text 20"/>
+          <p:cNvSpPr/>
+          <p:nvPr/>
+        </p:nvSpPr>
+        <p:spPr>
+          <a:xfrm>
+            <a:off x="6476695" y="3657600"/>
+            <a:ext cx="457200" cy="457200"/>
+          </a:xfrm>
+          <a:prstGeom prst="rect">
+            <a:avLst/>
+          </a:prstGeom>
+          <a:noFill/>
+          <a:ln/>
+        </p:spPr>
+        <p:txBody>
+          <a:bodyPr wrap="square" lIns="0" tIns="0" rIns="0" bIns="0" rtlCol="0" anchor="ctr"/>
+          <a:lstStyle/>
+          <a:p>
+            <a:pPr algn="ctr" indent="0" marL="0">
+              <a:buNone/>
+            </a:pPr>
+            <a:endParaRPr lang="en-US" sz="1600" dirty="0"/>
+          </a:p>
+        </p:txBody>
+      </p:sp>
+      <p:sp>
+        <p:nvSpPr>
+          <p:cNvPr id="23" name="Text 21"/>
+          <p:cNvSpPr/>
+          <p:nvPr/>
+        </p:nvSpPr>
+        <p:spPr>
+          <a:xfrm>
+            <a:off x="7071055" y="3611880"/>
+            <a:ext cx="4434840" cy="457200"/>
+          </a:xfrm>
+          <a:prstGeom prst="rect">
+            <a:avLst/>
+          </a:prstGeom>
+          <a:noFill/>
+          <a:ln/>
+        </p:spPr>
+        <p:txBody>
+          <a:bodyPr wrap="square" lIns="0" tIns="0" rIns="0" bIns="0" rtlCol="0" anchor="ctr"/>
+          <a:lstStyle/>
+          <a:p>
+            <a:pPr indent="0" marL="0">
+              <a:buNone/>
+            </a:pPr>
+            <a:r>
+              <a:rPr lang="en-US" sz="1450" b="1" dirty="0">
+                <a:solidFill>
+                  <a:srgbClr val="1B2A4A"/>
+                </a:solidFill>
+                <a:latin typeface="Yu Gothic" pitchFamily="34" charset="0"/>
+                <a:ea typeface="Yu Gothic" pitchFamily="34" charset="-122"/>
+                <a:cs typeface="Yu Gothic" pitchFamily="34" charset="-120"/>
+              </a:rPr>
+              <a:t>加盟店の移行障壁と競合激化</a:t>
+            </a:r>
+            <a:endParaRPr lang="en-US" sz="1450" dirty="0"/>
+          </a:p>
+        </p:txBody>
+      </p:sp>
+      <p:sp>
+        <p:nvSpPr>
+          <p:cNvPr id="24" name="Text 22"/>
+          <p:cNvSpPr/>
+          <p:nvPr/>
+        </p:nvSpPr>
+        <p:spPr>
+          <a:xfrm>
+            <a:off x="6522415" y="4160520"/>
+            <a:ext cx="4937760" cy="640080"/>
+          </a:xfrm>
+          <a:prstGeom prst="rect">
+            <a:avLst/>
+          </a:prstGeom>
+          <a:noFill/>
+          <a:ln/>
+        </p:spPr>
+        <p:txBody>
+          <a:bodyPr wrap="square" lIns="0" tIns="0" rIns="0" bIns="0" rtlCol="0" anchor="t"/>
+          <a:lstStyle/>
+          <a:p>
+            <a:pPr marL="342900" indent="-342900">
+              <a:spcAft>
+                <a:spcPts val="600"/>
+              </a:spcAft>
+              <a:buSzPct val="100000"/>
+              <a:buChar char="•"/>
+            </a:pPr>
+            <a:r>
+              <a:rPr lang="en-US" sz="1200" dirty="0">
+                <a:solidFill>
+                  <a:srgbClr val="3A3A3A"/>
+                </a:solidFill>
+                <a:latin typeface="Yu Gothic" pitchFamily="34" charset="0"/>
+                <a:ea typeface="Yu Gothic" pitchFamily="34" charset="-122"/>
+                <a:cs typeface="Yu Gothic" pitchFamily="34" charset="-120"/>
+              </a:rPr>
+              <a:t>独自ポイント運営企業にとってのスイッチングコスト</a:t>
+            </a:r>
+            <a:endParaRPr lang="en-US" sz="1200" dirty="0"/>
+          </a:p>
+          <a:p>
+            <a:pPr marL="342900" indent="-342900">
+              <a:spcAft>
+                <a:spcPts val="600"/>
+              </a:spcAft>
+              <a:buSzPct val="100000"/>
+              <a:buChar char="•"/>
+            </a:pPr>
+            <a:r>
+              <a:rPr lang="en-US" sz="1200" dirty="0">
+                <a:solidFill>
+                  <a:srgbClr val="3A3A3A"/>
+                </a:solidFill>
+                <a:latin typeface="Yu Gothic" pitchFamily="34" charset="0"/>
+                <a:ea typeface="Yu Gothic" pitchFamily="34" charset="-122"/>
+                <a:cs typeface="Yu Gothic" pitchFamily="34" charset="-120"/>
+              </a:rPr>
+              <a:t>楽天・Ponta・PayPay等、既存共通ポイントとの獲得競争</a:t>
+            </a:r>
+            <a:endParaRPr lang="en-US" sz="1200" dirty="0"/>
+          </a:p>
+        </p:txBody>
+      </p:sp>
+      <p:sp>
+        <p:nvSpPr>
+          <p:cNvPr id="25" name="Shape 23"/>
+          <p:cNvSpPr/>
+          <p:nvPr/>
+        </p:nvSpPr>
+        <p:spPr>
+          <a:xfrm>
+            <a:off x="457200" y="5166360"/>
+            <a:ext cx="11277295" cy="777240"/>
+          </a:xfrm>
+          <a:prstGeom prst="roundRect">
+            <a:avLst>
+              <a:gd name="adj" fmla="val 9412"/>
+            </a:avLst>
+          </a:prstGeom>
+          <a:solidFill>
+            <a:srgbClr val="1B2A4A"/>
+          </a:solidFill>
+          <a:ln/>
+        </p:spPr>
+      </p:sp>
+      <p:sp>
+        <p:nvSpPr>
+          <p:cNvPr id="26" name="Text 24"/>
+          <p:cNvSpPr/>
+          <p:nvPr/>
+        </p:nvSpPr>
+        <p:spPr>
+          <a:xfrm>
+            <a:off x="822960" y="5166360"/>
+            <a:ext cx="10545775" cy="777240"/>
+          </a:xfrm>
+          <a:prstGeom prst="rect">
+            <a:avLst/>
+          </a:prstGeom>
+          <a:noFill/>
+          <a:ln/>
+        </p:spPr>
+        <p:txBody>
+          <a:bodyPr wrap="square" lIns="0" tIns="0" rIns="0" bIns="0" rtlCol="0" anchor="ctr"/>
+          <a:lstStyle/>
+          <a:p>
+            <a:pPr indent="0" marL="0">
+              <a:buNone/>
+            </a:pPr>
+            <a:r>
+              <a:rPr lang="en-US" sz="1400" b="1" dirty="0">
+                <a:solidFill>
+                  <a:srgbClr val="FFFFFF"/>
+                </a:solidFill>
+                <a:latin typeface="Yu Gothic" pitchFamily="34" charset="0"/>
+                <a:ea typeface="Yu Gothic" pitchFamily="34" charset="-122"/>
+                <a:cs typeface="Yu Gothic" pitchFamily="34" charset="-120"/>
+              </a:rPr>
+              <a:t>対応の方向性：</a:t>
+            </a:r>
+            <a:pPr indent="0" marL="0">
+              <a:buNone/>
+            </a:pPr>
+            <a:r>
+              <a:rPr lang="en-US" sz="1250" dirty="0">
+                <a:solidFill>
+                  <a:srgbClr val="D8DCE8"/>
+                </a:solidFill>
+                <a:latin typeface="Yu Gothic" pitchFamily="34" charset="0"/>
+                <a:ea typeface="Yu Gothic" pitchFamily="34" charset="-122"/>
+                <a:cs typeface="Yu Gothic" pitchFamily="34" charset="-120"/>
+              </a:rPr>
+              <a:t>小規模パートナーでの実証実験からレート・UIを検証し、段階的に拡大する。リスクを織り込んだ設計こそ、基盤事業としての信頼につながる。</a:t>
+            </a:r>
+            <a:endParaRPr lang="en-US" sz="1400" dirty="0"/>
+          </a:p>
+        </p:txBody>
+      </p:sp>
+      <p:sp>
+        <p:nvSpPr>
+          <p:cNvPr id="27" name="Text 25"/>
+          <p:cNvSpPr/>
+          <p:nvPr/>
+        </p:nvSpPr>
+        <p:spPr>
+          <a:xfrm>
+            <a:off x="457200" y="6263640"/>
+            <a:ext cx="7315200" cy="274320"/>
+          </a:xfrm>
+          <a:prstGeom prst="rect">
+            <a:avLst/>
+          </a:prstGeom>
+          <a:noFill/>
+          <a:ln/>
+        </p:spPr>
+        <p:txBody>
+          <a:bodyPr wrap="square" lIns="0" tIns="0" rIns="0" bIns="0" rtlCol="0" anchor="ctr"/>
+          <a:lstStyle/>
+          <a:p>
+            <a:pPr indent="0" marL="0">
+              <a:buNone/>
+            </a:pPr>
+            <a:r>
+              <a:rPr lang="en-US" sz="900" dirty="0">
+                <a:solidFill>
+                  <a:srgbClr val="6E6E6E"/>
+                </a:solidFill>
+                <a:latin typeface="Yu Gothic" pitchFamily="34" charset="0"/>
+                <a:ea typeface="Yu Gothic" pitchFamily="34" charset="-122"/>
+                <a:cs typeface="Yu Gothic" pitchFamily="34" charset="-120"/>
+              </a:rPr>
+              <a:t>d-pointホワイトレーベル提案｜補強資料</a:t>
+            </a:r>
+            <a:endParaRPr lang="en-US" sz="900" dirty="0"/>
+          </a:p>
+        </p:txBody>
+      </p:sp>
+      <p:sp>
+        <p:nvSpPr>
+          <p:cNvPr id="28" name="Shape 26"/>
+          <p:cNvSpPr/>
+          <p:nvPr/>
+        </p:nvSpPr>
+        <p:spPr>
+          <a:xfrm>
+            <a:off x="11441887" y="6236208"/>
+            <a:ext cx="292608" cy="292608"/>
+          </a:xfrm>
+          <a:prstGeom prst="ellipse">
+            <a:avLst/>
+          </a:prstGeom>
+          <a:solidFill>
+            <a:srgbClr val="1B2A4A"/>
+          </a:solidFill>
+          <a:ln/>
+        </p:spPr>
+      </p:sp>
+      <p:sp>
+        <p:nvSpPr>
+          <p:cNvPr id="29" name="Text 27"/>
+          <p:cNvSpPr/>
+          <p:nvPr/>
+        </p:nvSpPr>
+        <p:spPr>
+          <a:xfrm>
+            <a:off x="11441887" y="6236208"/>
+            <a:ext cx="292608" cy="292608"/>
+          </a:xfrm>
+          <a:prstGeom prst="rect">
+            <a:avLst/>
+          </a:prstGeom>
+          <a:noFill/>
+          <a:ln/>
+        </p:spPr>
+        <p:txBody>
+          <a:bodyPr wrap="square" lIns="0" tIns="0" rIns="0" bIns="0" rtlCol="0" anchor="ctr"/>
+          <a:lstStyle/>
+          <a:p>
+            <a:pPr algn="ctr" indent="0" marL="0">
+              <a:buNone/>
+            </a:pPr>
+            <a:r>
+              <a:rPr lang="en-US" sz="1100" b="1" dirty="0">
+                <a:solidFill>
+                  <a:srgbClr val="FFFFFF"/>
+                </a:solidFill>
+                <a:latin typeface="Yu Gothic" pitchFamily="34" charset="0"/>
+                <a:ea typeface="Yu Gothic" pitchFamily="34" charset="-122"/>
+                <a:cs typeface="Yu Gothic" pitchFamily="34" charset="-120"/>
+              </a:rPr>
+              <a:t>4</a:t>
             </a:r>
             <a:endParaRPr lang="en-US" sz="1100" dirty="0"/>
           </a:p>

--- a/大貴/添付ファイル/新事業提案_補強スライド.pptx
+++ b/大貴/添付ファイル/新事業提案_補強スライド.pptx
@@ -2130,7 +2130,7 @@
                 <a:ea typeface="Yu Gothic" pitchFamily="34" charset="-122"/>
                 <a:cs typeface="Yu Gothic" pitchFamily="34" charset="-120"/>
               </a:rPr>
-              <a:t>会員基盤1億人超を土台にした3本柱構造。収益の主力は「手数料」より「データ活用」</a:t>
+              <a:t>会員基盤1億人超を土台にした2本柱構造。収益の主力は「手数料」より「データ活用」</a:t>
             </a:r>
             <a:endParaRPr lang="en-US" sz="1500" dirty="0"/>
           </a:p>
@@ -2145,7 +2145,7 @@
         <p:spPr>
           <a:xfrm>
             <a:off x="457200" y="1691640"/>
-            <a:ext cx="3606394" cy="1874520"/>
+            <a:ext cx="5455768" cy="1874520"/>
           </a:xfrm>
           <a:prstGeom prst="roundRect">
             <a:avLst>
@@ -2233,7 +2233,7 @@
         <p:spPr>
           <a:xfrm>
             <a:off x="1280160" y="1892808"/>
-            <a:ext cx="2600554" cy="502920"/>
+            <a:ext cx="4449928" cy="502920"/>
           </a:xfrm>
           <a:prstGeom prst="rect">
             <a:avLst/>
@@ -2249,7 +2249,7 @@
               <a:buNone/>
             </a:pPr>
             <a:r>
-              <a:rPr lang="en-US" sz="1300" b="1" dirty="0">
+              <a:rPr lang="en-US" sz="1500" b="1" dirty="0">
                 <a:solidFill>
                   <a:srgbClr val="1B2A4A"/>
                 </a:solidFill>
@@ -2259,7 +2259,7 @@
               </a:rPr>
               <a:t>ポイント発行手数料</a:t>
             </a:r>
-            <a:endParaRPr lang="en-US" sz="1300" dirty="0"/>
+            <a:endParaRPr lang="en-US" sz="1500" dirty="0"/>
           </a:p>
         </p:txBody>
       </p:sp>
@@ -2272,7 +2272,7 @@
         <p:spPr>
           <a:xfrm>
             <a:off x="731520" y="2468880"/>
-            <a:ext cx="3057754" cy="914400"/>
+            <a:ext cx="4907128" cy="914400"/>
           </a:xfrm>
           <a:prstGeom prst="rect">
             <a:avLst/>
@@ -2292,7 +2292,7 @@
               <a:buChar char="•"/>
             </a:pPr>
             <a:r>
-              <a:rPr lang="en-US" sz="1150" dirty="0">
+              <a:rPr lang="en-US" sz="1250" dirty="0">
                 <a:solidFill>
                   <a:srgbClr val="3A3A3A"/>
                 </a:solidFill>
@@ -2302,7 +2302,7 @@
               </a:rPr>
               <a:t>加盟店はポイントを「1pt＝1円＋α」でドコモから購入</a:t>
             </a:r>
-            <a:endParaRPr lang="en-US" sz="1150" dirty="0"/>
+            <a:endParaRPr lang="en-US" sz="1250" dirty="0"/>
           </a:p>
           <a:p>
             <a:pPr marL="342900" indent="-342900">
@@ -2313,7 +2313,7 @@
               <a:buChar char="•"/>
             </a:pPr>
             <a:r>
-              <a:rPr lang="en-US" sz="1150" dirty="0">
+              <a:rPr lang="en-US" sz="1250" dirty="0">
                 <a:solidFill>
                   <a:srgbClr val="3A3A3A"/>
                 </a:solidFill>
@@ -2323,7 +2323,7 @@
               </a:rPr>
               <a:t>差額（α）が手数料収入。料率は加盟店ごとの個別契約で非公開</a:t>
             </a:r>
-            <a:endParaRPr lang="en-US" sz="1150" dirty="0"/>
+            <a:endParaRPr lang="en-US" sz="1250" dirty="0"/>
           </a:p>
         </p:txBody>
       </p:sp>
@@ -2335,8 +2335,8 @@
         </p:nvSpPr>
         <p:spPr>
           <a:xfrm>
-            <a:off x="4292194" y="1691640"/>
-            <a:ext cx="3606394" cy="1874520"/>
+            <a:off x="6278728" y="1691640"/>
+            <a:ext cx="5455768" cy="1874520"/>
           </a:xfrm>
           <a:prstGeom prst="roundRect">
             <a:avLst>
@@ -2364,14 +2364,14 @@
         </p:nvSpPr>
         <p:spPr>
           <a:xfrm>
-            <a:off x="4520794" y="1920240"/>
+            <a:off x="6507328" y="1920240"/>
             <a:ext cx="457200" cy="457200"/>
           </a:xfrm>
           <a:prstGeom prst="ellipse">
             <a:avLst/>
           </a:prstGeom>
           <a:solidFill>
-            <a:srgbClr val="C7000F"/>
+            <a:srgbClr val="1E7A4C"/>
           </a:solidFill>
           <a:ln/>
         </p:spPr>
@@ -2384,7 +2384,7 @@
         </p:nvSpPr>
         <p:spPr>
           <a:xfrm>
-            <a:off x="4520794" y="1920240"/>
+            <a:off x="6507328" y="1920240"/>
             <a:ext cx="457200" cy="457200"/>
           </a:xfrm>
           <a:prstGeom prst="rect">
@@ -2423,8 +2423,8 @@
         </p:nvSpPr>
         <p:spPr>
           <a:xfrm>
-            <a:off x="5115154" y="1892808"/>
-            <a:ext cx="2600554" cy="502920"/>
+            <a:off x="7101688" y="1892808"/>
+            <a:ext cx="4449928" cy="502920"/>
           </a:xfrm>
           <a:prstGeom prst="rect">
             <a:avLst/>
@@ -2440,7 +2440,7 @@
               <a:buNone/>
             </a:pPr>
             <a:r>
-              <a:rPr lang="en-US" sz="1300" b="1" dirty="0">
+              <a:rPr lang="en-US" sz="1500" b="1" dirty="0">
                 <a:solidFill>
                   <a:srgbClr val="1B2A4A"/>
                 </a:solidFill>
@@ -2448,9 +2448,9 @@
                 <a:ea typeface="Yu Gothic" pitchFamily="34" charset="-122"/>
                 <a:cs typeface="Yu Gothic" pitchFamily="34" charset="-120"/>
               </a:rPr>
-              <a:t>決済手数料（d払い）</a:t>
-            </a:r>
-            <a:endParaRPr lang="en-US" sz="1300" dirty="0"/>
+              <a:t>マーケティングソリューション</a:t>
+            </a:r>
+            <a:endParaRPr lang="en-US" sz="1500" dirty="0"/>
           </a:p>
         </p:txBody>
       </p:sp>
@@ -2462,8 +2462,8 @@
         </p:nvSpPr>
         <p:spPr>
           <a:xfrm>
-            <a:off x="4566514" y="2468880"/>
-            <a:ext cx="3057754" cy="914400"/>
+            <a:off x="6553048" y="2468880"/>
+            <a:ext cx="4907128" cy="914400"/>
           </a:xfrm>
           <a:prstGeom prst="rect">
             <a:avLst/>
@@ -2483,7 +2483,7 @@
               <a:buChar char="•"/>
             </a:pPr>
             <a:r>
-              <a:rPr lang="en-US" sz="1150" dirty="0">
+              <a:rPr lang="en-US" sz="1250" dirty="0">
                 <a:solidFill>
                   <a:srgbClr val="3A3A3A"/>
                 </a:solidFill>
@@ -2491,9 +2491,9 @@
                 <a:ea typeface="Yu Gothic" pitchFamily="34" charset="-122"/>
                 <a:cs typeface="Yu Gothic" pitchFamily="34" charset="-120"/>
               </a:rPr>
-              <a:t>決済額に応じて加盟店から徴収</a:t>
-            </a:r>
-            <a:endParaRPr lang="en-US" sz="1150" dirty="0"/>
+              <a:t>購買・行動データを活用した広告配信・CRM</a:t>
+            </a:r>
+            <a:endParaRPr lang="en-US" sz="1250" dirty="0"/>
           </a:p>
           <a:p>
             <a:pPr marL="342900" indent="-342900">
@@ -2504,7 +2504,7 @@
               <a:buChar char="•"/>
             </a:pPr>
             <a:r>
-              <a:rPr lang="en-US" sz="1150" dirty="0">
+              <a:rPr lang="en-US" sz="1250" dirty="0">
                 <a:solidFill>
                   <a:srgbClr val="3A3A3A"/>
                 </a:solidFill>
@@ -2512,9 +2512,30 @@
                 <a:ea typeface="Yu Gothic" pitchFamily="34" charset="-122"/>
                 <a:cs typeface="Yu Gothic" pitchFamily="34" charset="-120"/>
               </a:rPr>
-              <a:t>目安2.00%〜（決済代行経由、要個別見積り）</a:t>
-            </a:r>
-            <a:endParaRPr lang="en-US" sz="1150" dirty="0"/>
+              <a:t>docomo Sense等のデータ分析基盤を提供</a:t>
+            </a:r>
+            <a:endParaRPr lang="en-US" sz="1250" dirty="0"/>
+          </a:p>
+          <a:p>
+            <a:pPr marL="342900" indent="-342900">
+              <a:spcAft>
+                <a:spcPts val="600"/>
+              </a:spcAft>
+              <a:buSzPct val="100000"/>
+              <a:buChar char="•"/>
+            </a:pPr>
+            <a:r>
+              <a:rPr lang="en-US" sz="1250" dirty="0">
+                <a:solidFill>
+                  <a:srgbClr val="3A3A3A"/>
+                </a:solidFill>
+                <a:latin typeface="Yu Gothic" pitchFamily="34" charset="0"/>
+                <a:ea typeface="Yu Gothic" pitchFamily="34" charset="-122"/>
+                <a:cs typeface="Yu Gothic" pitchFamily="34" charset="-120"/>
+              </a:rPr>
+              <a:t>現時点で収益の主力と推定される</a:t>
+            </a:r>
+            <a:endParaRPr lang="en-US" sz="1250" dirty="0"/>
           </a:p>
         </p:txBody>
       </p:sp>
@@ -2526,12 +2547,12 @@
         </p:nvSpPr>
         <p:spPr>
           <a:xfrm>
-            <a:off x="8127187" y="1691640"/>
-            <a:ext cx="3606394" cy="1874520"/>
+            <a:off x="457200" y="3794760"/>
+            <a:ext cx="3606394" cy="1051560"/>
           </a:xfrm>
           <a:prstGeom prst="roundRect">
             <a:avLst>
-              <a:gd name="adj" fmla="val 3902"/>
+              <a:gd name="adj" fmla="val 6957"/>
             </a:avLst>
           </a:prstGeom>
           <a:solidFill>
@@ -2549,23 +2570,42 @@
       </p:sp>
       <p:sp>
         <p:nvSpPr>
-          <p:cNvPr id="16" name="Shape 14"/>
-          <p:cNvSpPr/>
-          <p:nvPr/>
-        </p:nvSpPr>
-        <p:spPr>
-          <a:xfrm>
-            <a:off x="8355787" y="1920240"/>
-            <a:ext cx="457200" cy="457200"/>
-          </a:xfrm>
-          <a:prstGeom prst="ellipse">
-            <a:avLst/>
-          </a:prstGeom>
-          <a:solidFill>
-            <a:srgbClr val="1E7A4C"/>
-          </a:solidFill>
-          <a:ln/>
-        </p:spPr>
+          <p:cNvPr id="16" name="Text 14"/>
+          <p:cNvSpPr/>
+          <p:nvPr/>
+        </p:nvSpPr>
+        <p:spPr>
+          <a:xfrm>
+            <a:off x="594360" y="3931920"/>
+            <a:ext cx="3332074" cy="502920"/>
+          </a:xfrm>
+          <a:prstGeom prst="rect">
+            <a:avLst/>
+          </a:prstGeom>
+          <a:noFill/>
+          <a:ln/>
+        </p:spPr>
+        <p:txBody>
+          <a:bodyPr wrap="square" lIns="0" tIns="0" rIns="0" bIns="0" rtlCol="0" anchor="ctr"/>
+          <a:lstStyle/>
+          <a:p>
+            <a:pPr algn="ctr" indent="0" marL="0">
+              <a:buNone/>
+            </a:pPr>
+            <a:r>
+              <a:rPr lang="en-US" sz="2200" b="1" dirty="0">
+                <a:solidFill>
+                  <a:srgbClr val="1B2A4A"/>
+                </a:solidFill>
+                <a:latin typeface="Yu Gothic" pitchFamily="34" charset="0"/>
+                <a:ea typeface="Yu Gothic" pitchFamily="34" charset="-122"/>
+                <a:cs typeface="Yu Gothic" pitchFamily="34" charset="-120"/>
+              </a:rPr>
+              <a:t>1億人超</a:t>
+            </a:r>
+            <a:endParaRPr lang="en-US" sz="2200" dirty="0"/>
+          </a:p>
+        </p:txBody>
       </p:sp>
       <p:sp>
         <p:nvSpPr>
@@ -2575,171 +2615,47 @@
         </p:nvSpPr>
         <p:spPr>
           <a:xfrm>
-            <a:off x="8355787" y="1920240"/>
-            <a:ext cx="457200" cy="457200"/>
-          </a:xfrm>
-          <a:prstGeom prst="rect">
-            <a:avLst/>
-          </a:prstGeom>
-          <a:noFill/>
-          <a:ln/>
-        </p:spPr>
-        <p:txBody>
-          <a:bodyPr wrap="square" lIns="0" tIns="0" rIns="0" bIns="0" rtlCol="0" anchor="ctr"/>
+            <a:off x="594360" y="4416552"/>
+            <a:ext cx="3332074" cy="384048"/>
+          </a:xfrm>
+          <a:prstGeom prst="rect">
+            <a:avLst/>
+          </a:prstGeom>
+          <a:noFill/>
+          <a:ln/>
+        </p:spPr>
+        <p:txBody>
+          <a:bodyPr wrap="square" lIns="0" tIns="0" rIns="0" bIns="0" rtlCol="0" anchor="t"/>
           <a:lstStyle/>
           <a:p>
             <a:pPr algn="ctr" indent="0" marL="0">
               <a:buNone/>
             </a:pPr>
             <a:r>
-              <a:rPr lang="en-US" sz="1600" b="1" dirty="0">
-                <a:solidFill>
-                  <a:srgbClr val="FFFFFF"/>
-                </a:solidFill>
-                <a:latin typeface="Yu Gothic" pitchFamily="34" charset="0"/>
-                <a:ea typeface="Yu Gothic" pitchFamily="34" charset="-122"/>
-                <a:cs typeface="Yu Gothic" pitchFamily="34" charset="-120"/>
-              </a:rPr>
-              <a:t>3</a:t>
-            </a:r>
-            <a:endParaRPr lang="en-US" sz="1600" dirty="0"/>
-          </a:p>
-        </p:txBody>
-      </p:sp>
-      <p:sp>
-        <p:nvSpPr>
-          <p:cNvPr id="18" name="Text 16"/>
-          <p:cNvSpPr/>
-          <p:nvPr/>
-        </p:nvSpPr>
-        <p:spPr>
-          <a:xfrm>
-            <a:off x="8950147" y="1892808"/>
-            <a:ext cx="2600554" cy="502920"/>
-          </a:xfrm>
-          <a:prstGeom prst="rect">
-            <a:avLst/>
-          </a:prstGeom>
-          <a:noFill/>
-          <a:ln/>
-        </p:spPr>
-        <p:txBody>
-          <a:bodyPr wrap="square" lIns="0" tIns="0" rIns="0" bIns="0" rtlCol="0" anchor="ctr"/>
-          <a:lstStyle/>
-          <a:p>
-            <a:pPr indent="0" marL="0">
-              <a:buNone/>
-            </a:pPr>
-            <a:r>
-              <a:rPr lang="en-US" sz="1300" b="1" dirty="0">
-                <a:solidFill>
-                  <a:srgbClr val="1B2A4A"/>
-                </a:solidFill>
-                <a:latin typeface="Yu Gothic" pitchFamily="34" charset="0"/>
-                <a:ea typeface="Yu Gothic" pitchFamily="34" charset="-122"/>
-                <a:cs typeface="Yu Gothic" pitchFamily="34" charset="-120"/>
-              </a:rPr>
-              <a:t>マーケティングソリューション</a:t>
-            </a:r>
-            <a:endParaRPr lang="en-US" sz="1300" dirty="0"/>
-          </a:p>
-        </p:txBody>
-      </p:sp>
-      <p:sp>
-        <p:nvSpPr>
-          <p:cNvPr id="19" name="Text 17"/>
-          <p:cNvSpPr/>
-          <p:nvPr/>
-        </p:nvSpPr>
-        <p:spPr>
-          <a:xfrm>
-            <a:off x="8401507" y="2468880"/>
-            <a:ext cx="3057754" cy="914400"/>
-          </a:xfrm>
-          <a:prstGeom prst="rect">
-            <a:avLst/>
-          </a:prstGeom>
-          <a:noFill/>
-          <a:ln/>
-        </p:spPr>
-        <p:txBody>
-          <a:bodyPr wrap="square" lIns="0" tIns="0" rIns="0" bIns="0" rtlCol="0" anchor="t"/>
-          <a:lstStyle/>
-          <a:p>
-            <a:pPr marL="342900" indent="-342900">
-              <a:spcAft>
-                <a:spcPts val="600"/>
-              </a:spcAft>
-              <a:buSzPct val="100000"/>
-              <a:buChar char="•"/>
-            </a:pPr>
-            <a:r>
-              <a:rPr lang="en-US" sz="1150" dirty="0">
-                <a:solidFill>
-                  <a:srgbClr val="3A3A3A"/>
-                </a:solidFill>
-                <a:latin typeface="Yu Gothic" pitchFamily="34" charset="0"/>
-                <a:ea typeface="Yu Gothic" pitchFamily="34" charset="-122"/>
-                <a:cs typeface="Yu Gothic" pitchFamily="34" charset="-120"/>
-              </a:rPr>
-              <a:t>購買・行動データを活用した広告配信・CRM</a:t>
-            </a:r>
-            <a:endParaRPr lang="en-US" sz="1150" dirty="0"/>
-          </a:p>
-          <a:p>
-            <a:pPr marL="342900" indent="-342900">
-              <a:spcAft>
-                <a:spcPts val="600"/>
-              </a:spcAft>
-              <a:buSzPct val="100000"/>
-              <a:buChar char="•"/>
-            </a:pPr>
-            <a:r>
-              <a:rPr lang="en-US" sz="1150" dirty="0">
-                <a:solidFill>
-                  <a:srgbClr val="3A3A3A"/>
-                </a:solidFill>
-                <a:latin typeface="Yu Gothic" pitchFamily="34" charset="0"/>
-                <a:ea typeface="Yu Gothic" pitchFamily="34" charset="-122"/>
-                <a:cs typeface="Yu Gothic" pitchFamily="34" charset="-120"/>
-              </a:rPr>
-              <a:t>docomo Sense等のデータ分析基盤を提供</a:t>
-            </a:r>
-            <a:endParaRPr lang="en-US" sz="1150" dirty="0"/>
-          </a:p>
-          <a:p>
-            <a:pPr marL="342900" indent="-342900">
-              <a:spcAft>
-                <a:spcPts val="600"/>
-              </a:spcAft>
-              <a:buSzPct val="100000"/>
-              <a:buChar char="•"/>
-            </a:pPr>
-            <a:r>
-              <a:rPr lang="en-US" sz="1150" dirty="0">
-                <a:solidFill>
-                  <a:srgbClr val="3A3A3A"/>
-                </a:solidFill>
-                <a:latin typeface="Yu Gothic" pitchFamily="34" charset="0"/>
-                <a:ea typeface="Yu Gothic" pitchFamily="34" charset="-122"/>
-                <a:cs typeface="Yu Gothic" pitchFamily="34" charset="-120"/>
-              </a:rPr>
-              <a:t>現時点で収益の主力と推定される</a:t>
-            </a:r>
-            <a:endParaRPr lang="en-US" sz="1150" dirty="0"/>
-          </a:p>
-        </p:txBody>
-      </p:sp>
-      <p:sp>
-        <p:nvSpPr>
-          <p:cNvPr id="20" name="Shape 18"/>
-          <p:cNvSpPr/>
-          <p:nvPr/>
-        </p:nvSpPr>
-        <p:spPr>
-          <a:xfrm>
-            <a:off x="457200" y="3794760"/>
-            <a:ext cx="2681935" cy="1051560"/>
+              <a:rPr lang="en-US" sz="1100" dirty="0">
+                <a:solidFill>
+                  <a:srgbClr val="6E6E6E"/>
+                </a:solidFill>
+                <a:latin typeface="Yu Gothic" pitchFamily="34" charset="0"/>
+                <a:ea typeface="Yu Gothic" pitchFamily="34" charset="-122"/>
+                <a:cs typeface="Yu Gothic" pitchFamily="34" charset="-120"/>
+              </a:rPr>
+              <a:t>dポイントクラブ会員数</a:t>
+            </a:r>
+            <a:endParaRPr lang="en-US" sz="1100" dirty="0"/>
+          </a:p>
+        </p:txBody>
+      </p:sp>
+      <p:sp>
+        <p:nvSpPr>
+          <p:cNvPr id="18" name="Shape 16"/>
+          <p:cNvSpPr/>
+          <p:nvPr/>
+        </p:nvSpPr>
+        <p:spPr>
+          <a:xfrm>
+            <a:off x="4292194" y="3794760"/>
+            <a:ext cx="3606394" cy="1051560"/>
           </a:xfrm>
           <a:prstGeom prst="roundRect">
             <a:avLst>
@@ -2761,14 +2677,14 @@
       </p:sp>
       <p:sp>
         <p:nvSpPr>
-          <p:cNvPr id="21" name="Text 19"/>
-          <p:cNvSpPr/>
-          <p:nvPr/>
-        </p:nvSpPr>
-        <p:spPr>
-          <a:xfrm>
-            <a:off x="594360" y="3904488"/>
-            <a:ext cx="2407615" cy="457200"/>
+          <p:cNvPr id="19" name="Text 17"/>
+          <p:cNvSpPr/>
+          <p:nvPr/>
+        </p:nvSpPr>
+        <p:spPr>
+          <a:xfrm>
+            <a:off x="4429354" y="3931920"/>
+            <a:ext cx="3332074" cy="502920"/>
           </a:xfrm>
           <a:prstGeom prst="rect">
             <a:avLst/>
@@ -2784,7 +2700,7 @@
               <a:buNone/>
             </a:pPr>
             <a:r>
-              <a:rPr lang="en-US" sz="1900" b="1" dirty="0">
+              <a:rPr lang="en-US" sz="2200" b="1" dirty="0">
                 <a:solidFill>
                   <a:srgbClr val="1B2A4A"/>
                 </a:solidFill>
@@ -2792,22 +2708,22 @@
                 <a:ea typeface="Yu Gothic" pitchFamily="34" charset="-122"/>
                 <a:cs typeface="Yu Gothic" pitchFamily="34" charset="-120"/>
               </a:rPr>
-              <a:t>1億人超</a:t>
-            </a:r>
-            <a:endParaRPr lang="en-US" sz="1900" dirty="0"/>
-          </a:p>
-        </p:txBody>
-      </p:sp>
-      <p:sp>
-        <p:nvSpPr>
-          <p:cNvPr id="22" name="Text 20"/>
-          <p:cNvSpPr/>
-          <p:nvPr/>
-        </p:nvSpPr>
-        <p:spPr>
-          <a:xfrm>
-            <a:off x="594360" y="4361688"/>
-            <a:ext cx="2407615" cy="438912"/>
+              <a:t>約3,344億pt</a:t>
+            </a:r>
+            <a:endParaRPr lang="en-US" sz="2200" dirty="0"/>
+          </a:p>
+        </p:txBody>
+      </p:sp>
+      <p:sp>
+        <p:nvSpPr>
+          <p:cNvPr id="20" name="Text 18"/>
+          <p:cNvSpPr/>
+          <p:nvPr/>
+        </p:nvSpPr>
+        <p:spPr>
+          <a:xfrm>
+            <a:off x="4429354" y="4416552"/>
+            <a:ext cx="3332074" cy="384048"/>
           </a:xfrm>
           <a:prstGeom prst="rect">
             <a:avLst/>
@@ -2823,7 +2739,7 @@
               <a:buNone/>
             </a:pPr>
             <a:r>
-              <a:rPr lang="en-US" sz="950" dirty="0">
+              <a:rPr lang="en-US" sz="1100" dirty="0">
                 <a:solidFill>
                   <a:srgbClr val="6E6E6E"/>
                 </a:solidFill>
@@ -2831,22 +2747,22 @@
                 <a:ea typeface="Yu Gothic" pitchFamily="34" charset="-122"/>
                 <a:cs typeface="Yu Gothic" pitchFamily="34" charset="-120"/>
               </a:rPr>
-              <a:t>dポイントクラブ会員数</a:t>
-            </a:r>
-            <a:endParaRPr lang="en-US" sz="950" dirty="0"/>
-          </a:p>
-        </p:txBody>
-      </p:sp>
-      <p:sp>
-        <p:nvSpPr>
-          <p:cNvPr id="23" name="Shape 21"/>
-          <p:cNvSpPr/>
-          <p:nvPr/>
-        </p:nvSpPr>
-        <p:spPr>
-          <a:xfrm>
-            <a:off x="3322015" y="3794760"/>
-            <a:ext cx="2681935" cy="1051560"/>
+              <a:t>年間ポイント進呈量（額面相当）</a:t>
+            </a:r>
+            <a:endParaRPr lang="en-US" sz="1100" dirty="0"/>
+          </a:p>
+        </p:txBody>
+      </p:sp>
+      <p:sp>
+        <p:nvSpPr>
+          <p:cNvPr id="21" name="Shape 19"/>
+          <p:cNvSpPr/>
+          <p:nvPr/>
+        </p:nvSpPr>
+        <p:spPr>
+          <a:xfrm>
+            <a:off x="8127187" y="3794760"/>
+            <a:ext cx="3606394" cy="1051560"/>
           </a:xfrm>
           <a:prstGeom prst="roundRect">
             <a:avLst>
@@ -2868,14 +2784,14 @@
       </p:sp>
       <p:sp>
         <p:nvSpPr>
-          <p:cNvPr id="24" name="Text 22"/>
-          <p:cNvSpPr/>
-          <p:nvPr/>
-        </p:nvSpPr>
-        <p:spPr>
-          <a:xfrm>
-            <a:off x="3459175" y="3904488"/>
-            <a:ext cx="2407615" cy="457200"/>
+          <p:cNvPr id="22" name="Text 20"/>
+          <p:cNvSpPr/>
+          <p:nvPr/>
+        </p:nvSpPr>
+        <p:spPr>
+          <a:xfrm>
+            <a:off x="8264347" y="3931920"/>
+            <a:ext cx="3332074" cy="502920"/>
           </a:xfrm>
           <a:prstGeom prst="rect">
             <a:avLst/>
@@ -2891,7 +2807,7 @@
               <a:buNone/>
             </a:pPr>
             <a:r>
-              <a:rPr lang="en-US" sz="1900" b="1" dirty="0">
+              <a:rPr lang="en-US" sz="2200" b="1" dirty="0">
                 <a:solidFill>
                   <a:srgbClr val="1B2A4A"/>
                 </a:solidFill>
@@ -2899,22 +2815,22 @@
                 <a:ea typeface="Yu Gothic" pitchFamily="34" charset="-122"/>
                 <a:cs typeface="Yu Gothic" pitchFamily="34" charset="-120"/>
               </a:rPr>
-              <a:t>約3,344億pt</a:t>
-            </a:r>
-            <a:endParaRPr lang="en-US" sz="1900" dirty="0"/>
-          </a:p>
-        </p:txBody>
-      </p:sp>
-      <p:sp>
-        <p:nvSpPr>
-          <p:cNvPr id="25" name="Text 23"/>
-          <p:cNvSpPr/>
-          <p:nvPr/>
-        </p:nvSpPr>
-        <p:spPr>
-          <a:xfrm>
-            <a:off x="3459175" y="4361688"/>
-            <a:ext cx="2407615" cy="438912"/>
+              <a:t>約1,500億円</a:t>
+            </a:r>
+            <a:endParaRPr lang="en-US" sz="2200" dirty="0"/>
+          </a:p>
+        </p:txBody>
+      </p:sp>
+      <p:sp>
+        <p:nvSpPr>
+          <p:cNvPr id="23" name="Text 21"/>
+          <p:cNvSpPr/>
+          <p:nvPr/>
+        </p:nvSpPr>
+        <p:spPr>
+          <a:xfrm>
+            <a:off x="8264347" y="4416552"/>
+            <a:ext cx="3332074" cy="384048"/>
           </a:xfrm>
           <a:prstGeom prst="rect">
             <a:avLst/>
@@ -2930,7 +2846,7 @@
               <a:buNone/>
             </a:pPr>
             <a:r>
-              <a:rPr lang="en-US" sz="950" dirty="0">
+              <a:rPr lang="en-US" sz="1100" dirty="0">
                 <a:solidFill>
                   <a:srgbClr val="6E6E6E"/>
                 </a:solidFill>
@@ -2938,22 +2854,22 @@
                 <a:ea typeface="Yu Gothic" pitchFamily="34" charset="-122"/>
                 <a:cs typeface="Yu Gothic" pitchFamily="34" charset="-120"/>
               </a:rPr>
-              <a:t>年間ポイント進呈量（額面相当）</a:t>
-            </a:r>
-            <a:endParaRPr lang="en-US" sz="950" dirty="0"/>
-          </a:p>
-        </p:txBody>
-      </p:sp>
-      <p:sp>
-        <p:nvSpPr>
-          <p:cNvPr id="26" name="Shape 24"/>
-          <p:cNvSpPr/>
-          <p:nvPr/>
-        </p:nvSpPr>
-        <p:spPr>
-          <a:xfrm>
-            <a:off x="6186830" y="3794760"/>
-            <a:ext cx="2681935" cy="1051560"/>
+              <a:t>マーケティングソリューション事業収益（年換算）</a:t>
+            </a:r>
+            <a:endParaRPr lang="en-US" sz="1100" dirty="0"/>
+          </a:p>
+        </p:txBody>
+      </p:sp>
+      <p:sp>
+        <p:nvSpPr>
+          <p:cNvPr id="24" name="Shape 22"/>
+          <p:cNvSpPr/>
+          <p:nvPr/>
+        </p:nvSpPr>
+        <p:spPr>
+          <a:xfrm>
+            <a:off x="457200" y="4983480"/>
+            <a:ext cx="11277295" cy="1051560"/>
           </a:xfrm>
           <a:prstGeom prst="roundRect">
             <a:avLst>
@@ -2961,237 +2877,6 @@
             </a:avLst>
           </a:prstGeom>
           <a:solidFill>
-            <a:srgbClr val="FAFAFA"/>
-          </a:solidFill>
-          <a:ln/>
-          <a:effectLst>
-            <a:outerShdw sx="100000" sy="100000" kx="0" ky="0" algn="bl" rotWithShape="0" blurRad="76200" dist="25400" dir="5400000">
-              <a:srgbClr val="000000">
-                <a:alpha val="12000"/>
-              </a:srgbClr>
-            </a:outerShdw>
-          </a:effectLst>
-        </p:spPr>
-      </p:sp>
-      <p:sp>
-        <p:nvSpPr>
-          <p:cNvPr id="27" name="Text 25"/>
-          <p:cNvSpPr/>
-          <p:nvPr/>
-        </p:nvSpPr>
-        <p:spPr>
-          <a:xfrm>
-            <a:off x="6323990" y="3904488"/>
-            <a:ext cx="2407615" cy="457200"/>
-          </a:xfrm>
-          <a:prstGeom prst="rect">
-            <a:avLst/>
-          </a:prstGeom>
-          <a:noFill/>
-          <a:ln/>
-        </p:spPr>
-        <p:txBody>
-          <a:bodyPr wrap="square" lIns="0" tIns="0" rIns="0" bIns="0" rtlCol="0" anchor="ctr"/>
-          <a:lstStyle/>
-          <a:p>
-            <a:pPr algn="ctr" indent="0" marL="0">
-              <a:buNone/>
-            </a:pPr>
-            <a:r>
-              <a:rPr lang="en-US" sz="1900" b="1" dirty="0">
-                <a:solidFill>
-                  <a:srgbClr val="1B2A4A"/>
-                </a:solidFill>
-                <a:latin typeface="Yu Gothic" pitchFamily="34" charset="0"/>
-                <a:ea typeface="Yu Gothic" pitchFamily="34" charset="-122"/>
-                <a:cs typeface="Yu Gothic" pitchFamily="34" charset="-120"/>
-              </a:rPr>
-              <a:t>5,965億円</a:t>
-            </a:r>
-            <a:endParaRPr lang="en-US" sz="1900" dirty="0"/>
-          </a:p>
-        </p:txBody>
-      </p:sp>
-      <p:sp>
-        <p:nvSpPr>
-          <p:cNvPr id="28" name="Text 26"/>
-          <p:cNvSpPr/>
-          <p:nvPr/>
-        </p:nvSpPr>
-        <p:spPr>
-          <a:xfrm>
-            <a:off x="6323990" y="4361688"/>
-            <a:ext cx="2407615" cy="438912"/>
-          </a:xfrm>
-          <a:prstGeom prst="rect">
-            <a:avLst/>
-          </a:prstGeom>
-          <a:noFill/>
-          <a:ln/>
-        </p:spPr>
-        <p:txBody>
-          <a:bodyPr wrap="square" lIns="0" tIns="0" rIns="0" bIns="0" rtlCol="0" anchor="t"/>
-          <a:lstStyle/>
-          <a:p>
-            <a:pPr algn="ctr" indent="0" marL="0">
-              <a:buNone/>
-            </a:pPr>
-            <a:r>
-              <a:rPr lang="en-US" sz="950" dirty="0">
-                <a:solidFill>
-                  <a:srgbClr val="6E6E6E"/>
-                </a:solidFill>
-                <a:latin typeface="Yu Gothic" pitchFamily="34" charset="0"/>
-                <a:ea typeface="Yu Gothic" pitchFamily="34" charset="-122"/>
-                <a:cs typeface="Yu Gothic" pitchFamily="34" charset="-120"/>
-              </a:rPr>
-              <a:t>金融事業収益 2030年度目標1.2兆円</a:t>
-            </a:r>
-            <a:endParaRPr lang="en-US" sz="950" dirty="0"/>
-          </a:p>
-        </p:txBody>
-      </p:sp>
-      <p:sp>
-        <p:nvSpPr>
-          <p:cNvPr id="29" name="Shape 27"/>
-          <p:cNvSpPr/>
-          <p:nvPr/>
-        </p:nvSpPr>
-        <p:spPr>
-          <a:xfrm>
-            <a:off x="9051646" y="3794760"/>
-            <a:ext cx="2681935" cy="1051560"/>
-          </a:xfrm>
-          <a:prstGeom prst="roundRect">
-            <a:avLst>
-              <a:gd name="adj" fmla="val 6957"/>
-            </a:avLst>
-          </a:prstGeom>
-          <a:solidFill>
-            <a:srgbClr val="FAFAFA"/>
-          </a:solidFill>
-          <a:ln/>
-          <a:effectLst>
-            <a:outerShdw sx="100000" sy="100000" kx="0" ky="0" algn="bl" rotWithShape="0" blurRad="76200" dist="25400" dir="5400000">
-              <a:srgbClr val="000000">
-                <a:alpha val="12000"/>
-              </a:srgbClr>
-            </a:outerShdw>
-          </a:effectLst>
-        </p:spPr>
-      </p:sp>
-      <p:sp>
-        <p:nvSpPr>
-          <p:cNvPr id="30" name="Text 28"/>
-          <p:cNvSpPr/>
-          <p:nvPr/>
-        </p:nvSpPr>
-        <p:spPr>
-          <a:xfrm>
-            <a:off x="9188806" y="3904488"/>
-            <a:ext cx="2407615" cy="457200"/>
-          </a:xfrm>
-          <a:prstGeom prst="rect">
-            <a:avLst/>
-          </a:prstGeom>
-          <a:noFill/>
-          <a:ln/>
-        </p:spPr>
-        <p:txBody>
-          <a:bodyPr wrap="square" lIns="0" tIns="0" rIns="0" bIns="0" rtlCol="0" anchor="ctr"/>
-          <a:lstStyle/>
-          <a:p>
-            <a:pPr algn="ctr" indent="0" marL="0">
-              <a:buNone/>
-            </a:pPr>
-            <a:r>
-              <a:rPr lang="en-US" sz="1900" b="1" dirty="0">
-                <a:solidFill>
-                  <a:srgbClr val="1B2A4A"/>
-                </a:solidFill>
-                <a:latin typeface="Yu Gothic" pitchFamily="34" charset="0"/>
-                <a:ea typeface="Yu Gothic" pitchFamily="34" charset="-122"/>
-                <a:cs typeface="Yu Gothic" pitchFamily="34" charset="-120"/>
-              </a:rPr>
-              <a:t>約1,500億円</a:t>
-            </a:r>
-            <a:endParaRPr lang="en-US" sz="1900" dirty="0"/>
-          </a:p>
-        </p:txBody>
-      </p:sp>
-      <p:sp>
-        <p:nvSpPr>
-          <p:cNvPr id="31" name="Text 29"/>
-          <p:cNvSpPr/>
-          <p:nvPr/>
-        </p:nvSpPr>
-        <p:spPr>
-          <a:xfrm>
-            <a:off x="9188806" y="4361688"/>
-            <a:ext cx="2407615" cy="438912"/>
-          </a:xfrm>
-          <a:prstGeom prst="rect">
-            <a:avLst/>
-          </a:prstGeom>
-          <a:noFill/>
-          <a:ln/>
-        </p:spPr>
-        <p:txBody>
-          <a:bodyPr wrap="square" lIns="0" tIns="0" rIns="0" bIns="0" rtlCol="0" anchor="t"/>
-          <a:lstStyle/>
-          <a:p>
-            <a:pPr algn="ctr" indent="0" marL="0">
-              <a:buNone/>
-            </a:pPr>
-            <a:r>
-              <a:rPr lang="en-US" sz="950" dirty="0">
-                <a:solidFill>
-                  <a:srgbClr val="6E6E6E"/>
-                </a:solidFill>
-                <a:latin typeface="Yu Gothic" pitchFamily="34" charset="0"/>
-                <a:ea typeface="Yu Gothic" pitchFamily="34" charset="-122"/>
-                <a:cs typeface="Yu Gothic" pitchFamily="34" charset="-120"/>
-              </a:rPr>
-              <a:t>マーケティングソリューション</a:t>
-            </a:r>
-            <a:endParaRPr lang="en-US" sz="950" dirty="0"/>
-          </a:p>
-          <a:p>
-            <a:pPr algn="ctr" indent="0" marL="0">
-              <a:buNone/>
-            </a:pPr>
-            <a:r>
-              <a:rPr lang="en-US" sz="950" dirty="0">
-                <a:solidFill>
-                  <a:srgbClr val="6E6E6E"/>
-                </a:solidFill>
-                <a:latin typeface="Yu Gothic" pitchFamily="34" charset="0"/>
-                <a:ea typeface="Yu Gothic" pitchFamily="34" charset="-122"/>
-                <a:cs typeface="Yu Gothic" pitchFamily="34" charset="-120"/>
-              </a:rPr>
-              <a:t>事業収益（年換算）</a:t>
-            </a:r>
-            <a:endParaRPr lang="en-US" sz="950" dirty="0"/>
-          </a:p>
-        </p:txBody>
-      </p:sp>
-      <p:sp>
-        <p:nvSpPr>
-          <p:cNvPr id="32" name="Shape 30"/>
-          <p:cNvSpPr/>
-          <p:nvPr/>
-        </p:nvSpPr>
-        <p:spPr>
-          <a:xfrm>
-            <a:off x="457200" y="4983480"/>
-            <a:ext cx="11277295" cy="1051560"/>
-          </a:xfrm>
-          <a:prstGeom prst="roundRect">
-            <a:avLst>
-              <a:gd name="adj" fmla="val 6957"/>
-            </a:avLst>
-          </a:prstGeom>
-          <a:solidFill>
             <a:srgbClr val="1B2A4A"/>
           </a:solidFill>
           <a:ln/>
@@ -3199,7 +2884,7 @@
       </p:sp>
       <p:sp>
         <p:nvSpPr>
-          <p:cNvPr id="33" name="Text 31"/>
+          <p:cNvPr id="25" name="Text 23"/>
           <p:cNvSpPr/>
           <p:nvPr/>
         </p:nvSpPr>
@@ -3262,7 +2947,7 @@
       </p:sp>
       <p:sp>
         <p:nvSpPr>
-          <p:cNvPr id="34" name="Text 32"/>
+          <p:cNvPr id="26" name="Text 24"/>
           <p:cNvSpPr/>
           <p:nvPr/>
         </p:nvSpPr>
@@ -3301,7 +2986,7 @@
       </p:sp>
       <p:sp>
         <p:nvSpPr>
-          <p:cNvPr id="35" name="Shape 33"/>
+          <p:cNvPr id="27" name="Shape 25"/>
           <p:cNvSpPr/>
           <p:nvPr/>
         </p:nvSpPr>
@@ -3321,7 +3006,7 @@
       </p:sp>
       <p:sp>
         <p:nvSpPr>
-          <p:cNvPr id="36" name="Text 34"/>
+          <p:cNvPr id="28" name="Text 26"/>
           <p:cNvSpPr/>
           <p:nvPr/>
         </p:nvSpPr>
